--- a/preview_v7/cn/l-cn-bs-u8-5.pptx
+++ b/preview_v7/cn/l-cn-bs-u8-5.pptx
@@ -3142,55 +3142,14 @@
       </p:sp>
       <p:sp>
         <p:nvSpPr>
-          <p:cNvPr id="3" name="TextBox 2"/>
-          <p:cNvSpPr txBox="1"/>
-          <p:nvPr/>
-        </p:nvSpPr>
-        <p:spPr>
-          <a:xfrm>
-            <a:off x="640080" y="640080"/>
-            <a:ext cx="10911535" cy="502920"/>
-          </a:xfrm>
-          <a:prstGeom prst="rect">
-            <a:avLst/>
-          </a:prstGeom>
-          <a:noFill/>
-        </p:spPr>
-        <p:txBody>
-          <a:bodyPr wrap="square" anchor="t" lIns="0" rIns="0" tIns="0" bIns="0">
-            <a:spAutoFit/>
-          </a:bodyPr>
-          <a:lstStyle/>
-          <a:p>
-            <a:pPr algn="l">
-              <a:spcAft>
-                <a:spcPts val="0"/>
-              </a:spcAft>
-            </a:pPr>
-            <a:r>
-              <a:rPr sz="1200" b="1">
-                <a:solidFill>
-                  <a:srgbClr val="B23A2A"/>
-                </a:solidFill>
-                <a:latin typeface="微软雅黑"/>
-                <a:ea typeface="微软雅黑"/>
-                <a:cs typeface="微软雅黑"/>
-              </a:rPr>
-              <a:t>语文 · 必修上册 · 第8单元 词语积累与词语解释</a:t>
-            </a:r>
-          </a:p>
-        </p:txBody>
-      </p:sp>
-      <p:sp>
-        <p:nvSpPr>
-          <p:cNvPr id="4" name="Rectangle 3"/>
+          <p:cNvPr id="3" name="Rectangle 2"/>
           <p:cNvSpPr/>
           <p:nvPr/>
         </p:nvSpPr>
         <p:spPr>
           <a:xfrm>
-            <a:off x="640080" y="1207008"/>
-            <a:ext cx="822960" cy="30480"/>
+            <a:off x="0" y="0"/>
+            <a:ext cx="201168" cy="6858000"/>
           </a:xfrm>
           <a:prstGeom prst="rect">
             <a:avLst/>
@@ -3227,14 +3186,14 @@
       </p:sp>
       <p:sp>
         <p:nvSpPr>
-          <p:cNvPr id="5" name="TextBox 4"/>
+          <p:cNvPr id="4" name="TextBox 3"/>
           <p:cNvSpPr txBox="1"/>
           <p:nvPr/>
         </p:nvSpPr>
         <p:spPr>
           <a:xfrm>
-            <a:off x="640080" y="1737360"/>
-            <a:ext cx="10911535" cy="2011680"/>
+            <a:off x="777240" y="640080"/>
+            <a:ext cx="6400800" cy="365760"/>
           </a:xfrm>
           <a:prstGeom prst="rect">
             <a:avLst/>
@@ -3248,71 +3207,34 @@
           <a:lstStyle/>
           <a:p>
             <a:pPr algn="l">
-              <a:lnSpc>
-                <a:spcPct val="115000"/>
-              </a:lnSpc>
+              <a:spcAft>
+                <a:spcPts val="0"/>
+              </a:spcAft>
             </a:pPr>
             <a:r>
-              <a:rPr sz="4000" b="1">
-                <a:solidFill>
-                  <a:srgbClr val="1C2A33"/>
-                </a:solidFill>
-                <a:latin typeface="楷体"/>
-                <a:ea typeface="楷体"/>
-                <a:cs typeface="楷体"/>
-              </a:rPr>
-              <a:t>成语探究——来源、结构与运用</a:t>
-            </a:r>
-          </a:p>
-        </p:txBody>
-      </p:sp>
-      <p:sp>
-        <p:nvSpPr>
-          <p:cNvPr id="6" name="TextBox 5"/>
-          <p:cNvSpPr txBox="1"/>
-          <p:nvPr/>
-        </p:nvSpPr>
-        <p:spPr>
-          <a:xfrm>
-            <a:off x="640080" y="3840480"/>
-            <a:ext cx="10911535" cy="457200"/>
-          </a:xfrm>
-          <a:prstGeom prst="rect">
-            <a:avLst/>
-          </a:prstGeom>
-          <a:noFill/>
-        </p:spPr>
-        <p:txBody>
-          <a:bodyPr wrap="square" anchor="t" lIns="0" rIns="0" tIns="0" bIns="0">
-            <a:spAutoFit/>
-          </a:bodyPr>
-          <a:lstStyle/>
-          <a:p>
-            <a:pPr algn="l"/>
-            <a:r>
-              <a:rPr sz="1700" b="1">
-                <a:solidFill>
-                  <a:srgbClr val="B23A2A"/>
+              <a:rPr sz="1300" b="1">
+                <a:solidFill>
+                  <a:srgbClr val="C8A86B"/>
                 </a:solidFill>
                 <a:latin typeface="微软雅黑"/>
                 <a:ea typeface="微软雅黑"/>
                 <a:cs typeface="微软雅黑"/>
               </a:rPr>
-              <a:t>成语探究  ·  第5课时  ·  45分钟</a:t>
-            </a:r>
-          </a:p>
-        </p:txBody>
-      </p:sp>
-      <p:sp>
-        <p:nvSpPr>
-          <p:cNvPr id="7" name="Rectangle 6"/>
+              <a:t>语文 · 必修上册 · 第8单元 词语积累与词语解释</a:t>
+            </a:r>
+          </a:p>
+        </p:txBody>
+      </p:sp>
+      <p:sp>
+        <p:nvSpPr>
+          <p:cNvPr id="5" name="Rectangle 4"/>
           <p:cNvSpPr/>
           <p:nvPr/>
         </p:nvSpPr>
         <p:spPr>
           <a:xfrm>
-            <a:off x="640080" y="5394960"/>
-            <a:ext cx="2011680" cy="33020"/>
+            <a:off x="777240" y="1097280"/>
+            <a:ext cx="822960" cy="30480"/>
           </a:xfrm>
           <a:prstGeom prst="rect">
             <a:avLst/>
@@ -3349,14 +3271,14 @@
       </p:sp>
       <p:sp>
         <p:nvSpPr>
-          <p:cNvPr id="8" name="TextBox 7"/>
+          <p:cNvPr id="6" name="TextBox 5"/>
           <p:cNvSpPr txBox="1"/>
           <p:nvPr/>
         </p:nvSpPr>
         <p:spPr>
           <a:xfrm>
-            <a:off x="640080" y="5623560"/>
-            <a:ext cx="10911535" cy="548640"/>
+            <a:off x="777240" y="1691640"/>
+            <a:ext cx="10637215" cy="2103120"/>
           </a:xfrm>
           <a:prstGeom prst="rect">
             <a:avLst/>
@@ -3369,24 +3291,231 @@
           </a:bodyPr>
           <a:lstStyle/>
           <a:p>
+            <a:pPr algn="l">
+              <a:lnSpc>
+                <a:spcPct val="118000"/>
+              </a:lnSpc>
+            </a:pPr>
+            <a:r>
+              <a:rPr sz="3400" b="1">
+                <a:solidFill>
+                  <a:srgbClr val="1C2A33"/>
+                </a:solidFill>
+                <a:latin typeface="楷体"/>
+                <a:ea typeface="楷体"/>
+                <a:cs typeface="楷体"/>
+              </a:rPr>
+              <a:t>成语探究——来源、结构与运用</a:t>
+            </a:r>
+          </a:p>
+        </p:txBody>
+      </p:sp>
+      <p:sp>
+        <p:nvSpPr>
+          <p:cNvPr id="7" name="TextBox 6"/>
+          <p:cNvSpPr txBox="1"/>
+          <p:nvPr/>
+        </p:nvSpPr>
+        <p:spPr>
+          <a:xfrm>
+            <a:off x="777240" y="3840480"/>
+            <a:ext cx="10637215" cy="868680"/>
+          </a:xfrm>
+          <a:prstGeom prst="rect">
+            <a:avLst/>
+          </a:prstGeom>
+          <a:noFill/>
+        </p:spPr>
+        <p:txBody>
+          <a:bodyPr wrap="square" anchor="t" lIns="0" rIns="0" tIns="0" bIns="0">
+            <a:spAutoFit/>
+          </a:bodyPr>
+          <a:lstStyle/>
+          <a:p>
+            <a:pPr algn="l">
+              <a:lnSpc>
+                <a:spcPct val="140000"/>
+              </a:lnSpc>
+            </a:pPr>
+            <a:r>
+              <a:rPr sz="1700" b="0">
+                <a:solidFill>
+                  <a:srgbClr val="6B6258"/>
+                </a:solidFill>
+                <a:latin typeface="楷体"/>
+                <a:ea typeface="楷体"/>
+                <a:cs typeface="楷体"/>
+              </a:rPr>
+              <a:t>成语是汉语浓缩的文化结晶，读得懂来源，才用得对。</a:t>
+            </a:r>
+          </a:p>
+        </p:txBody>
+      </p:sp>
+      <p:sp>
+        <p:nvSpPr>
+          <p:cNvPr id="8" name="Rectangle 7"/>
+          <p:cNvSpPr/>
+          <p:nvPr/>
+        </p:nvSpPr>
+        <p:spPr>
+          <a:xfrm>
+            <a:off x="0" y="5943600"/>
+            <a:ext cx="12191695" cy="914400"/>
+          </a:xfrm>
+          <a:prstGeom prst="rect">
+            <a:avLst/>
+          </a:prstGeom>
+          <a:solidFill>
+            <a:srgbClr val="1C2A33"/>
+          </a:solidFill>
+          <a:ln>
+            <a:noFill/>
+          </a:ln>
+          <a:effectLst/>
+        </p:spPr>
+        <p:style>
+          <a:lnRef idx="1">
+            <a:schemeClr val="accent1"/>
+          </a:lnRef>
+          <a:fillRef idx="3">
+            <a:schemeClr val="accent1"/>
+          </a:fillRef>
+          <a:effectRef idx="2">
+            <a:schemeClr val="accent1"/>
+          </a:effectRef>
+          <a:fontRef idx="minor">
+            <a:schemeClr val="lt1"/>
+          </a:fontRef>
+        </p:style>
+        <p:txBody>
+          <a:bodyPr rtlCol="0" anchor="ctr"/>
+          <a:lstStyle/>
+          <a:p>
+            <a:pPr algn="ctr"/>
+          </a:p>
+        </p:txBody>
+      </p:sp>
+      <p:sp>
+        <p:nvSpPr>
+          <p:cNvPr id="9" name="Rectangle 8"/>
+          <p:cNvSpPr/>
+          <p:nvPr/>
+        </p:nvSpPr>
+        <p:spPr>
+          <a:xfrm>
+            <a:off x="777240" y="6144768"/>
+            <a:ext cx="822960" cy="30480"/>
+          </a:xfrm>
+          <a:prstGeom prst="rect">
+            <a:avLst/>
+          </a:prstGeom>
+          <a:solidFill>
+            <a:srgbClr val="C8A86B"/>
+          </a:solidFill>
+          <a:ln>
+            <a:noFill/>
+          </a:ln>
+          <a:effectLst/>
+        </p:spPr>
+        <p:style>
+          <a:lnRef idx="1">
+            <a:schemeClr val="accent1"/>
+          </a:lnRef>
+          <a:fillRef idx="3">
+            <a:schemeClr val="accent1"/>
+          </a:fillRef>
+          <a:effectRef idx="2">
+            <a:schemeClr val="accent1"/>
+          </a:effectRef>
+          <a:fontRef idx="minor">
+            <a:schemeClr val="lt1"/>
+          </a:fontRef>
+        </p:style>
+        <p:txBody>
+          <a:bodyPr rtlCol="0" anchor="ctr"/>
+          <a:lstStyle/>
+          <a:p>
+            <a:pPr algn="ctr"/>
+          </a:p>
+        </p:txBody>
+      </p:sp>
+      <p:sp>
+        <p:nvSpPr>
+          <p:cNvPr id="10" name="TextBox 9"/>
+          <p:cNvSpPr txBox="1"/>
+          <p:nvPr/>
+        </p:nvSpPr>
+        <p:spPr>
+          <a:xfrm>
+            <a:off x="777240" y="6181344"/>
+            <a:ext cx="10515600" cy="411480"/>
+          </a:xfrm>
+          <a:prstGeom prst="rect">
+            <a:avLst/>
+          </a:prstGeom>
+          <a:noFill/>
+        </p:spPr>
+        <p:txBody>
+          <a:bodyPr wrap="square" anchor="t" lIns="0" rIns="0" tIns="0" bIns="0">
+            <a:spAutoFit/>
+          </a:bodyPr>
+          <a:lstStyle/>
+          <a:p>
             <a:pPr algn="l"/>
             <a:r>
               <a:rPr sz="1400" b="0">
                 <a:solidFill>
-                  <a:srgbClr val="6B6258"/>
+                  <a:srgbClr val="FFFFFF"/>
                 </a:solidFill>
                 <a:latin typeface="微软雅黑"/>
                 <a:ea typeface="微软雅黑"/>
                 <a:cs typeface="微软雅黑"/>
               </a:rPr>
-              <a:t>学习任务群：语言积累    |    年级：高一</a:t>
-            </a:r>
-          </a:p>
-        </p:txBody>
-      </p:sp>
-      <p:sp>
-        <p:nvSpPr>
-          <p:cNvPr id="9" name="TextBox 8"/>
+              <a:t>第5课时 · 成语探究 · 学生课堂版</a:t>
+            </a:r>
+          </a:p>
+        </p:txBody>
+      </p:sp>
+      <p:sp>
+        <p:nvSpPr>
+          <p:cNvPr id="11" name="TextBox 10"/>
+          <p:cNvSpPr txBox="1"/>
+          <p:nvPr/>
+        </p:nvSpPr>
+        <p:spPr>
+          <a:xfrm>
+            <a:off x="777240" y="6473952"/>
+            <a:ext cx="10515600" cy="310896"/>
+          </a:xfrm>
+          <a:prstGeom prst="rect">
+            <a:avLst/>
+          </a:prstGeom>
+          <a:noFill/>
+        </p:spPr>
+        <p:txBody>
+          <a:bodyPr wrap="square" anchor="t" lIns="0" rIns="0" tIns="0" bIns="0">
+            <a:spAutoFit/>
+          </a:bodyPr>
+          <a:lstStyle/>
+          <a:p>
+            <a:pPr algn="l"/>
+            <a:r>
+              <a:rPr sz="1100" b="0">
+                <a:solidFill>
+                  <a:srgbClr val="E7DFD2"/>
+                </a:solidFill>
+                <a:latin typeface="微软雅黑"/>
+                <a:ea typeface="微软雅黑"/>
+                <a:cs typeface="微软雅黑"/>
+              </a:rPr>
+              <a:t>科目：语文　册次：必修上册　单元：词语积累与词语解释</a:t>
+            </a:r>
+          </a:p>
+        </p:txBody>
+      </p:sp>
+      <p:sp>
+        <p:nvSpPr>
+          <p:cNvPr id="12" name="TextBox 11"/>
           <p:cNvSpPr txBox="1"/>
           <p:nvPr/>
         </p:nvSpPr>
@@ -3519,7 +3648,7 @@
                 <a:ea typeface="微软雅黑"/>
                 <a:cs typeface="微软雅黑"/>
               </a:rPr>
-              <a:t>学习目标</a:t>
+              <a:t>本课目标</a:t>
             </a:r>
           </a:p>
         </p:txBody>
@@ -3570,14 +3699,51 @@
       </p:sp>
       <p:sp>
         <p:nvSpPr>
-          <p:cNvPr id="5" name="Rounded Rectangle 4"/>
+          <p:cNvPr id="5" name="TextBox 4"/>
+          <p:cNvSpPr txBox="1"/>
+          <p:nvPr/>
+        </p:nvSpPr>
+        <p:spPr>
+          <a:xfrm>
+            <a:off x="640080" y="1325880"/>
+            <a:ext cx="10058400" cy="640080"/>
+          </a:xfrm>
+          <a:prstGeom prst="rect">
+            <a:avLst/>
+          </a:prstGeom>
+          <a:noFill/>
+        </p:spPr>
+        <p:txBody>
+          <a:bodyPr wrap="square" anchor="t" lIns="0" rIns="0" tIns="0" bIns="0">
+            <a:spAutoFit/>
+          </a:bodyPr>
+          <a:lstStyle/>
+          <a:p>
+            <a:pPr algn="l"/>
+            <a:r>
+              <a:rPr sz="3000" b="1">
+                <a:solidFill>
+                  <a:srgbClr val="1C2A33"/>
+                </a:solidFill>
+                <a:latin typeface="楷体"/>
+                <a:ea typeface="楷体"/>
+                <a:cs typeface="楷体"/>
+              </a:rPr>
+              <a:t>四向学习目标</a:t>
+            </a:r>
+          </a:p>
+        </p:txBody>
+      </p:sp>
+      <p:sp>
+        <p:nvSpPr>
+          <p:cNvPr id="6" name="Rounded Rectangle 5"/>
           <p:cNvSpPr/>
           <p:nvPr/>
         </p:nvSpPr>
         <p:spPr>
           <a:xfrm>
-            <a:off x="640080" y="1417320"/>
-            <a:ext cx="5349240" cy="2057400"/>
+            <a:off x="640080" y="2194560"/>
+            <a:ext cx="10911535" cy="868680"/>
           </a:xfrm>
           <a:prstGeom prst="roundRect">
             <a:avLst/>
@@ -3585,7 +3751,7 @@
           <a:solidFill>
             <a:srgbClr val="FFFFFF"/>
           </a:solidFill>
-          <a:ln w="22860">
+          <a:ln w="17780">
             <a:solidFill>
               <a:srgbClr val="B23A2A"/>
             </a:solidFill>
@@ -3616,16 +3782,16 @@
       </p:sp>
       <p:sp>
         <p:nvSpPr>
-          <p:cNvPr id="6" name="Oval 5"/>
+          <p:cNvPr id="7" name="Rectangle 6"/>
           <p:cNvSpPr/>
           <p:nvPr/>
         </p:nvSpPr>
         <p:spPr>
           <a:xfrm>
-            <a:off x="804672" y="1581912"/>
-            <a:ext cx="457200" cy="457200"/>
-          </a:xfrm>
-          <a:prstGeom prst="ellipse">
+            <a:off x="640080" y="2194560"/>
+            <a:ext cx="109728" cy="868680"/>
+          </a:xfrm>
+          <a:prstGeom prst="rect">
             <a:avLst/>
           </a:prstGeom>
           <a:solidFill>
@@ -3660,14 +3826,14 @@
       </p:sp>
       <p:sp>
         <p:nvSpPr>
-          <p:cNvPr id="7" name="TextBox 6"/>
+          <p:cNvPr id="8" name="TextBox 7"/>
           <p:cNvSpPr txBox="1"/>
           <p:nvPr/>
         </p:nvSpPr>
         <p:spPr>
           <a:xfrm>
-            <a:off x="804672" y="1636776"/>
-            <a:ext cx="457200" cy="384048"/>
+            <a:off x="932688" y="2194560"/>
+            <a:ext cx="10454335" cy="868680"/>
           </a:xfrm>
           <a:prstGeom prst="rect">
             <a:avLst/>
@@ -3675,96 +3841,25 @@
           <a:noFill/>
         </p:spPr>
         <p:txBody>
-          <a:bodyPr wrap="square" anchor="t" lIns="0" rIns="0" tIns="0" bIns="0">
+          <a:bodyPr wrap="square" anchor="ctr" lIns="0" rIns="0" tIns="0" bIns="0">
             <a:spAutoFit/>
           </a:bodyPr>
           <a:lstStyle/>
           <a:p>
-            <a:pPr algn="ctr"/>
-            <a:r>
-              <a:rPr sz="1600" b="1">
-                <a:solidFill>
-                  <a:srgbClr val="FFFFFF"/>
+            <a:pPr algn="l"/>
+            <a:r>
+              <a:rPr sz="1500" b="1">
+                <a:solidFill>
+                  <a:srgbClr val="B23A2A"/>
                 </a:solidFill>
                 <a:latin typeface="微软雅黑"/>
                 <a:ea typeface="微软雅黑"/>
                 <a:cs typeface="微软雅黑"/>
               </a:rPr>
-              <a:t>1</a:t>
-            </a:r>
-          </a:p>
-        </p:txBody>
-      </p:sp>
-      <p:sp>
-        <p:nvSpPr>
-          <p:cNvPr id="8" name="TextBox 7"/>
-          <p:cNvSpPr txBox="1"/>
-          <p:nvPr/>
-        </p:nvSpPr>
-        <p:spPr>
-          <a:xfrm>
-            <a:off x="1371600" y="1527048"/>
-            <a:ext cx="4434840" cy="457200"/>
-          </a:xfrm>
-          <a:prstGeom prst="rect">
-            <a:avLst/>
-          </a:prstGeom>
-          <a:noFill/>
-        </p:spPr>
-        <p:txBody>
-          <a:bodyPr wrap="square" anchor="t" lIns="0" rIns="0" tIns="0" bIns="0">
-            <a:spAutoFit/>
-          </a:bodyPr>
-          <a:lstStyle/>
-          <a:p>
-            <a:pPr algn="l">
-              <a:lnSpc>
-                <a:spcPct val="110000"/>
-              </a:lnSpc>
-            </a:pPr>
-            <a:r>
-              <a:rPr sz="1600" b="1">
-                <a:solidFill>
-                  <a:srgbClr val="1C2A33"/>
-                </a:solidFill>
-                <a:latin typeface="微软雅黑"/>
-                <a:ea typeface="微软雅黑"/>
-                <a:cs typeface="微软雅黑"/>
-              </a:rPr>
-              <a:t>目标</a:t>
-            </a:r>
-          </a:p>
-        </p:txBody>
-      </p:sp>
-      <p:sp>
-        <p:nvSpPr>
-          <p:cNvPr id="9" name="TextBox 8"/>
-          <p:cNvSpPr txBox="1"/>
-          <p:nvPr/>
-        </p:nvSpPr>
-        <p:spPr>
-          <a:xfrm>
-            <a:off x="1371600" y="1965960"/>
-            <a:ext cx="4434840" cy="1417320"/>
-          </a:xfrm>
-          <a:prstGeom prst="rect">
-            <a:avLst/>
-          </a:prstGeom>
-          <a:noFill/>
-        </p:spPr>
-        <p:txBody>
-          <a:bodyPr wrap="square" anchor="t" lIns="0" rIns="0" tIns="0" bIns="0">
-            <a:spAutoFit/>
-          </a:bodyPr>
-          <a:lstStyle/>
-          <a:p>
-            <a:pPr algn="l">
-              <a:lnSpc>
-                <a:spcPct val="128000"/>
-              </a:lnSpc>
-            </a:pPr>
-            <a:r>
-              <a:rPr sz="1200" b="0">
+              <a:t>语言能力　</a:t>
+            </a:r>
+            <a:r>
+              <a:rPr sz="1350" b="0">
                 <a:solidFill>
                   <a:srgbClr val="1C2A33"/>
                 </a:solidFill>
@@ -3772,21 +3867,21 @@
                 <a:ea typeface="楷体"/>
                 <a:cs typeface="楷体"/>
               </a:rPr>
-              <a:t>语言能力：说出成语四类来源并举要例，指出常见误用（望文生义/对象错/色彩错），在语境中正确运用。</a:t>
-            </a:r>
-          </a:p>
-        </p:txBody>
-      </p:sp>
-      <p:sp>
-        <p:nvSpPr>
-          <p:cNvPr id="10" name="Rounded Rectangle 9"/>
+              <a:t>说出成语四类来源并举要例，指出常见误用（望文生义/对象错/色彩错），在语境中正确运用。</a:t>
+            </a:r>
+          </a:p>
+        </p:txBody>
+      </p:sp>
+      <p:sp>
+        <p:nvSpPr>
+          <p:cNvPr id="9" name="Rounded Rectangle 8"/>
           <p:cNvSpPr/>
           <p:nvPr/>
         </p:nvSpPr>
         <p:spPr>
           <a:xfrm>
-            <a:off x="6263640" y="1417320"/>
-            <a:ext cx="5349240" cy="2057400"/>
+            <a:off x="640080" y="3218688"/>
+            <a:ext cx="10911535" cy="868680"/>
           </a:xfrm>
           <a:prstGeom prst="roundRect">
             <a:avLst/>
@@ -3794,9 +3889,9 @@
           <a:solidFill>
             <a:srgbClr val="FFFFFF"/>
           </a:solidFill>
-          <a:ln w="22860">
+          <a:ln w="17780">
             <a:solidFill>
-              <a:srgbClr val="B23A2A"/>
+              <a:srgbClr val="2E7D6B"/>
             </a:solidFill>
           </a:ln>
           <a:effectLst/>
@@ -3825,20 +3920,20 @@
       </p:sp>
       <p:sp>
         <p:nvSpPr>
-          <p:cNvPr id="11" name="Oval 10"/>
+          <p:cNvPr id="10" name="Rectangle 9"/>
           <p:cNvSpPr/>
           <p:nvPr/>
         </p:nvSpPr>
         <p:spPr>
           <a:xfrm>
-            <a:off x="6428232" y="1581912"/>
-            <a:ext cx="457200" cy="457200"/>
-          </a:xfrm>
-          <a:prstGeom prst="ellipse">
+            <a:off x="640080" y="3218688"/>
+            <a:ext cx="109728" cy="868680"/>
+          </a:xfrm>
+          <a:prstGeom prst="rect">
             <a:avLst/>
           </a:prstGeom>
           <a:solidFill>
-            <a:srgbClr val="B23A2A"/>
+            <a:srgbClr val="2E7D6B"/>
           </a:solidFill>
           <a:ln>
             <a:noFill/>
@@ -3869,14 +3964,14 @@
       </p:sp>
       <p:sp>
         <p:nvSpPr>
-          <p:cNvPr id="12" name="TextBox 11"/>
+          <p:cNvPr id="11" name="TextBox 10"/>
           <p:cNvSpPr txBox="1"/>
           <p:nvPr/>
         </p:nvSpPr>
         <p:spPr>
           <a:xfrm>
-            <a:off x="6428232" y="1636776"/>
-            <a:ext cx="457200" cy="384048"/>
+            <a:off x="932688" y="3218688"/>
+            <a:ext cx="10454335" cy="868680"/>
           </a:xfrm>
           <a:prstGeom prst="rect">
             <a:avLst/>
@@ -3884,96 +3979,25 @@
           <a:noFill/>
         </p:spPr>
         <p:txBody>
-          <a:bodyPr wrap="square" anchor="t" lIns="0" rIns="0" tIns="0" bIns="0">
+          <a:bodyPr wrap="square" anchor="ctr" lIns="0" rIns="0" tIns="0" bIns="0">
             <a:spAutoFit/>
           </a:bodyPr>
           <a:lstStyle/>
           <a:p>
-            <a:pPr algn="ctr"/>
-            <a:r>
-              <a:rPr sz="1600" b="1">
-                <a:solidFill>
-                  <a:srgbClr val="FFFFFF"/>
+            <a:pPr algn="l"/>
+            <a:r>
+              <a:rPr sz="1500" b="1">
+                <a:solidFill>
+                  <a:srgbClr val="2E7D6B"/>
                 </a:solidFill>
                 <a:latin typeface="微软雅黑"/>
                 <a:ea typeface="微软雅黑"/>
                 <a:cs typeface="微软雅黑"/>
               </a:rPr>
-              <a:t>2</a:t>
-            </a:r>
-          </a:p>
-        </p:txBody>
-      </p:sp>
-      <p:sp>
-        <p:nvSpPr>
-          <p:cNvPr id="13" name="TextBox 12"/>
-          <p:cNvSpPr txBox="1"/>
-          <p:nvPr/>
-        </p:nvSpPr>
-        <p:spPr>
-          <a:xfrm>
-            <a:off x="6995160" y="1527048"/>
-            <a:ext cx="4434840" cy="457200"/>
-          </a:xfrm>
-          <a:prstGeom prst="rect">
-            <a:avLst/>
-          </a:prstGeom>
-          <a:noFill/>
-        </p:spPr>
-        <p:txBody>
-          <a:bodyPr wrap="square" anchor="t" lIns="0" rIns="0" tIns="0" bIns="0">
-            <a:spAutoFit/>
-          </a:bodyPr>
-          <a:lstStyle/>
-          <a:p>
-            <a:pPr algn="l">
-              <a:lnSpc>
-                <a:spcPct val="110000"/>
-              </a:lnSpc>
-            </a:pPr>
-            <a:r>
-              <a:rPr sz="1600" b="1">
-                <a:solidFill>
-                  <a:srgbClr val="1C2A33"/>
-                </a:solidFill>
-                <a:latin typeface="微软雅黑"/>
-                <a:ea typeface="微软雅黑"/>
-                <a:cs typeface="微软雅黑"/>
-              </a:rPr>
-              <a:t>目标</a:t>
-            </a:r>
-          </a:p>
-        </p:txBody>
-      </p:sp>
-      <p:sp>
-        <p:nvSpPr>
-          <p:cNvPr id="14" name="TextBox 13"/>
-          <p:cNvSpPr txBox="1"/>
-          <p:nvPr/>
-        </p:nvSpPr>
-        <p:spPr>
-          <a:xfrm>
-            <a:off x="6995160" y="1965960"/>
-            <a:ext cx="4434840" cy="1417320"/>
-          </a:xfrm>
-          <a:prstGeom prst="rect">
-            <a:avLst/>
-          </a:prstGeom>
-          <a:noFill/>
-        </p:spPr>
-        <p:txBody>
-          <a:bodyPr wrap="square" anchor="t" lIns="0" rIns="0" tIns="0" bIns="0">
-            <a:spAutoFit/>
-          </a:bodyPr>
-          <a:lstStyle/>
-          <a:p>
-            <a:pPr algn="l">
-              <a:lnSpc>
-                <a:spcPct val="128000"/>
-              </a:lnSpc>
-            </a:pPr>
-            <a:r>
-              <a:rPr sz="1400" b="0">
+              <a:t>文化意识　</a:t>
+            </a:r>
+            <a:r>
+              <a:rPr sz="1350" b="0">
                 <a:solidFill>
                   <a:srgbClr val="1C2A33"/>
                 </a:solidFill>
@@ -3981,21 +4005,21 @@
                 <a:ea typeface="楷体"/>
                 <a:cs typeface="楷体"/>
               </a:rPr>
-              <a:t>文化意识：理解成语是中华文化浓缩载体，体会其凝练之美。</a:t>
-            </a:r>
-          </a:p>
-        </p:txBody>
-      </p:sp>
-      <p:sp>
-        <p:nvSpPr>
-          <p:cNvPr id="15" name="Rounded Rectangle 14"/>
+              <a:t>理解成语是中华文化浓缩载体，体会其凝练之美。</a:t>
+            </a:r>
+          </a:p>
+        </p:txBody>
+      </p:sp>
+      <p:sp>
+        <p:nvSpPr>
+          <p:cNvPr id="12" name="Rounded Rectangle 11"/>
           <p:cNvSpPr/>
           <p:nvPr/>
         </p:nvSpPr>
         <p:spPr>
           <a:xfrm>
-            <a:off x="640080" y="3703320"/>
-            <a:ext cx="5349240" cy="2057400"/>
+            <a:off x="640080" y="4242816"/>
+            <a:ext cx="10911535" cy="868680"/>
           </a:xfrm>
           <a:prstGeom prst="roundRect">
             <a:avLst/>
@@ -4003,9 +4027,9 @@
           <a:solidFill>
             <a:srgbClr val="FFFFFF"/>
           </a:solidFill>
-          <a:ln w="22860">
+          <a:ln w="17780">
             <a:solidFill>
-              <a:srgbClr val="B23A2A"/>
+              <a:srgbClr val="C8A86B"/>
             </a:solidFill>
           </a:ln>
           <a:effectLst/>
@@ -4034,20 +4058,20 @@
       </p:sp>
       <p:sp>
         <p:nvSpPr>
-          <p:cNvPr id="16" name="Oval 15"/>
+          <p:cNvPr id="13" name="Rectangle 12"/>
           <p:cNvSpPr/>
           <p:nvPr/>
         </p:nvSpPr>
         <p:spPr>
           <a:xfrm>
-            <a:off x="804672" y="3867912"/>
-            <a:ext cx="457200" cy="457200"/>
-          </a:xfrm>
-          <a:prstGeom prst="ellipse">
+            <a:off x="640080" y="4242816"/>
+            <a:ext cx="109728" cy="868680"/>
+          </a:xfrm>
+          <a:prstGeom prst="rect">
             <a:avLst/>
           </a:prstGeom>
           <a:solidFill>
-            <a:srgbClr val="B23A2A"/>
+            <a:srgbClr val="C8A86B"/>
           </a:solidFill>
           <a:ln>
             <a:noFill/>
@@ -4078,14 +4102,14 @@
       </p:sp>
       <p:sp>
         <p:nvSpPr>
-          <p:cNvPr id="17" name="TextBox 16"/>
+          <p:cNvPr id="14" name="TextBox 13"/>
           <p:cNvSpPr txBox="1"/>
           <p:nvPr/>
         </p:nvSpPr>
         <p:spPr>
           <a:xfrm>
-            <a:off x="804672" y="3922776"/>
-            <a:ext cx="457200" cy="384048"/>
+            <a:off x="932688" y="4242816"/>
+            <a:ext cx="10454335" cy="868680"/>
           </a:xfrm>
           <a:prstGeom prst="rect">
             <a:avLst/>
@@ -4093,96 +4117,25 @@
           <a:noFill/>
         </p:spPr>
         <p:txBody>
-          <a:bodyPr wrap="square" anchor="t" lIns="0" rIns="0" tIns="0" bIns="0">
+          <a:bodyPr wrap="square" anchor="ctr" lIns="0" rIns="0" tIns="0" bIns="0">
             <a:spAutoFit/>
           </a:bodyPr>
           <a:lstStyle/>
           <a:p>
-            <a:pPr algn="ctr"/>
-            <a:r>
-              <a:rPr sz="1600" b="1">
-                <a:solidFill>
-                  <a:srgbClr val="FFFFFF"/>
+            <a:pPr algn="l"/>
+            <a:r>
+              <a:rPr sz="1500" b="1">
+                <a:solidFill>
+                  <a:srgbClr val="C8A86B"/>
                 </a:solidFill>
                 <a:latin typeface="微软雅黑"/>
                 <a:ea typeface="微软雅黑"/>
                 <a:cs typeface="微软雅黑"/>
               </a:rPr>
-              <a:t>3</a:t>
-            </a:r>
-          </a:p>
-        </p:txBody>
-      </p:sp>
-      <p:sp>
-        <p:nvSpPr>
-          <p:cNvPr id="18" name="TextBox 17"/>
-          <p:cNvSpPr txBox="1"/>
-          <p:nvPr/>
-        </p:nvSpPr>
-        <p:spPr>
-          <a:xfrm>
-            <a:off x="1371600" y="3813048"/>
-            <a:ext cx="4434840" cy="457200"/>
-          </a:xfrm>
-          <a:prstGeom prst="rect">
-            <a:avLst/>
-          </a:prstGeom>
-          <a:noFill/>
-        </p:spPr>
-        <p:txBody>
-          <a:bodyPr wrap="square" anchor="t" lIns="0" rIns="0" tIns="0" bIns="0">
-            <a:spAutoFit/>
-          </a:bodyPr>
-          <a:lstStyle/>
-          <a:p>
-            <a:pPr algn="l">
-              <a:lnSpc>
-                <a:spcPct val="110000"/>
-              </a:lnSpc>
-            </a:pPr>
-            <a:r>
-              <a:rPr sz="1600" b="1">
-                <a:solidFill>
-                  <a:srgbClr val="1C2A33"/>
-                </a:solidFill>
-                <a:latin typeface="微软雅黑"/>
-                <a:ea typeface="微软雅黑"/>
-                <a:cs typeface="微软雅黑"/>
-              </a:rPr>
-              <a:t>目标</a:t>
-            </a:r>
-          </a:p>
-        </p:txBody>
-      </p:sp>
-      <p:sp>
-        <p:nvSpPr>
-          <p:cNvPr id="19" name="TextBox 18"/>
-          <p:cNvSpPr txBox="1"/>
-          <p:nvPr/>
-        </p:nvSpPr>
-        <p:spPr>
-          <a:xfrm>
-            <a:off x="1371600" y="4251960"/>
-            <a:ext cx="4434840" cy="1417320"/>
-          </a:xfrm>
-          <a:prstGeom prst="rect">
-            <a:avLst/>
-          </a:prstGeom>
-          <a:noFill/>
-        </p:spPr>
-        <p:txBody>
-          <a:bodyPr wrap="square" anchor="t" lIns="0" rIns="0" tIns="0" bIns="0">
-            <a:spAutoFit/>
-          </a:bodyPr>
-          <a:lstStyle/>
-          <a:p>
-            <a:pPr algn="l">
-              <a:lnSpc>
-                <a:spcPct val="128000"/>
-              </a:lnSpc>
-            </a:pPr>
-            <a:r>
-              <a:rPr sz="1400" b="0">
+              <a:t>思维品质　</a:t>
+            </a:r>
+            <a:r>
+              <a:rPr sz="1350" b="0">
                 <a:solidFill>
                   <a:srgbClr val="1C2A33"/>
                 </a:solidFill>
@@ -4190,21 +4143,21 @@
                 <a:ea typeface="楷体"/>
                 <a:cs typeface="楷体"/>
               </a:rPr>
-              <a:t>思维品质：通过溯源与结构分析，培养成语的系统认知。</a:t>
-            </a:r>
-          </a:p>
-        </p:txBody>
-      </p:sp>
-      <p:sp>
-        <p:nvSpPr>
-          <p:cNvPr id="20" name="Rounded Rectangle 19"/>
+              <a:t>通过溯源与结构分析，培养成语的系统认知。</a:t>
+            </a:r>
+          </a:p>
+        </p:txBody>
+      </p:sp>
+      <p:sp>
+        <p:nvSpPr>
+          <p:cNvPr id="15" name="Rounded Rectangle 14"/>
           <p:cNvSpPr/>
           <p:nvPr/>
         </p:nvSpPr>
         <p:spPr>
           <a:xfrm>
-            <a:off x="6263640" y="3703320"/>
-            <a:ext cx="5349240" cy="2057400"/>
+            <a:off x="640080" y="5266944"/>
+            <a:ext cx="10911535" cy="868680"/>
           </a:xfrm>
           <a:prstGeom prst="roundRect">
             <a:avLst/>
@@ -4212,9 +4165,9 @@
           <a:solidFill>
             <a:srgbClr val="FFFFFF"/>
           </a:solidFill>
-          <a:ln w="22860">
+          <a:ln w="17780">
             <a:solidFill>
-              <a:srgbClr val="B23A2A"/>
+              <a:srgbClr val="6B6258"/>
             </a:solidFill>
           </a:ln>
           <a:effectLst/>
@@ -4243,20 +4196,20 @@
       </p:sp>
       <p:sp>
         <p:nvSpPr>
-          <p:cNvPr id="21" name="Oval 20"/>
+          <p:cNvPr id="16" name="Rectangle 15"/>
           <p:cNvSpPr/>
           <p:nvPr/>
         </p:nvSpPr>
         <p:spPr>
           <a:xfrm>
-            <a:off x="6428232" y="3867912"/>
-            <a:ext cx="457200" cy="457200"/>
-          </a:xfrm>
-          <a:prstGeom prst="ellipse">
+            <a:off x="640080" y="5266944"/>
+            <a:ext cx="109728" cy="868680"/>
+          </a:xfrm>
+          <a:prstGeom prst="rect">
             <a:avLst/>
           </a:prstGeom>
           <a:solidFill>
-            <a:srgbClr val="B23A2A"/>
+            <a:srgbClr val="6B6258"/>
           </a:solidFill>
           <a:ln>
             <a:noFill/>
@@ -4287,14 +4240,14 @@
       </p:sp>
       <p:sp>
         <p:nvSpPr>
-          <p:cNvPr id="22" name="TextBox 21"/>
+          <p:cNvPr id="17" name="TextBox 16"/>
           <p:cNvSpPr txBox="1"/>
           <p:nvPr/>
         </p:nvSpPr>
         <p:spPr>
           <a:xfrm>
-            <a:off x="6428232" y="3922776"/>
-            <a:ext cx="457200" cy="384048"/>
+            <a:off x="932688" y="5266944"/>
+            <a:ext cx="10454335" cy="868680"/>
           </a:xfrm>
           <a:prstGeom prst="rect">
             <a:avLst/>
@@ -4302,96 +4255,25 @@
           <a:noFill/>
         </p:spPr>
         <p:txBody>
-          <a:bodyPr wrap="square" anchor="t" lIns="0" rIns="0" tIns="0" bIns="0">
+          <a:bodyPr wrap="square" anchor="ctr" lIns="0" rIns="0" tIns="0" bIns="0">
             <a:spAutoFit/>
           </a:bodyPr>
           <a:lstStyle/>
           <a:p>
-            <a:pPr algn="ctr"/>
-            <a:r>
-              <a:rPr sz="1600" b="1">
-                <a:solidFill>
-                  <a:srgbClr val="FFFFFF"/>
+            <a:pPr algn="l"/>
+            <a:r>
+              <a:rPr sz="1500" b="1">
+                <a:solidFill>
+                  <a:srgbClr val="6B6258"/>
                 </a:solidFill>
                 <a:latin typeface="微软雅黑"/>
                 <a:ea typeface="微软雅黑"/>
                 <a:cs typeface="微软雅黑"/>
               </a:rPr>
-              <a:t>4</a:t>
-            </a:r>
-          </a:p>
-        </p:txBody>
-      </p:sp>
-      <p:sp>
-        <p:nvSpPr>
-          <p:cNvPr id="23" name="TextBox 22"/>
-          <p:cNvSpPr txBox="1"/>
-          <p:nvPr/>
-        </p:nvSpPr>
-        <p:spPr>
-          <a:xfrm>
-            <a:off x="6995160" y="3813048"/>
-            <a:ext cx="4434840" cy="457200"/>
-          </a:xfrm>
-          <a:prstGeom prst="rect">
-            <a:avLst/>
-          </a:prstGeom>
-          <a:noFill/>
-        </p:spPr>
-        <p:txBody>
-          <a:bodyPr wrap="square" anchor="t" lIns="0" rIns="0" tIns="0" bIns="0">
-            <a:spAutoFit/>
-          </a:bodyPr>
-          <a:lstStyle/>
-          <a:p>
-            <a:pPr algn="l">
-              <a:lnSpc>
-                <a:spcPct val="110000"/>
-              </a:lnSpc>
-            </a:pPr>
-            <a:r>
-              <a:rPr sz="1600" b="1">
-                <a:solidFill>
-                  <a:srgbClr val="1C2A33"/>
-                </a:solidFill>
-                <a:latin typeface="微软雅黑"/>
-                <a:ea typeface="微软雅黑"/>
-                <a:cs typeface="微软雅黑"/>
-              </a:rPr>
-              <a:t>目标</a:t>
-            </a:r>
-          </a:p>
-        </p:txBody>
-      </p:sp>
-      <p:sp>
-        <p:nvSpPr>
-          <p:cNvPr id="24" name="TextBox 23"/>
-          <p:cNvSpPr txBox="1"/>
-          <p:nvPr/>
-        </p:nvSpPr>
-        <p:spPr>
-          <a:xfrm>
-            <a:off x="6995160" y="4251960"/>
-            <a:ext cx="4434840" cy="1417320"/>
-          </a:xfrm>
-          <a:prstGeom prst="rect">
-            <a:avLst/>
-          </a:prstGeom>
-          <a:noFill/>
-        </p:spPr>
-        <p:txBody>
-          <a:bodyPr wrap="square" anchor="t" lIns="0" rIns="0" tIns="0" bIns="0">
-            <a:spAutoFit/>
-          </a:bodyPr>
-          <a:lstStyle/>
-          <a:p>
-            <a:pPr algn="l">
-              <a:lnSpc>
-                <a:spcPct val="128000"/>
-              </a:lnSpc>
-            </a:pPr>
-            <a:r>
-              <a:rPr sz="1400" b="0">
+              <a:t>学习能力　</a:t>
+            </a:r>
+            <a:r>
+              <a:rPr sz="1350" b="0">
                 <a:solidFill>
                   <a:srgbClr val="1C2A33"/>
                 </a:solidFill>
@@ -4399,14 +4281,14 @@
                 <a:ea typeface="楷体"/>
                 <a:cs typeface="楷体"/>
               </a:rPr>
-              <a:t>学习能力：掌握「查来源→看结构→辨对象色彩」的成语运用法。</a:t>
-            </a:r>
-          </a:p>
-        </p:txBody>
-      </p:sp>
-      <p:sp>
-        <p:nvSpPr>
-          <p:cNvPr id="25" name="TextBox 24"/>
+              <a:t>掌握「查来源→看结构→辨对象色彩」的成语运用法。</a:t>
+            </a:r>
+          </a:p>
+        </p:txBody>
+      </p:sp>
+      <p:sp>
+        <p:nvSpPr>
+          <p:cNvPr id="18" name="TextBox 17"/>
           <p:cNvSpPr txBox="1"/>
           <p:nvPr/>
         </p:nvSpPr>
@@ -4533,13 +4415,13 @@
             <a:r>
               <a:rPr sz="1300" b="1">
                 <a:solidFill>
-                  <a:srgbClr val="2E7D6B"/>
+                  <a:srgbClr val="B23A2A"/>
                 </a:solidFill>
                 <a:latin typeface="微软雅黑"/>
                 <a:ea typeface="微软雅黑"/>
                 <a:cs typeface="微软雅黑"/>
               </a:rPr>
-              <a:t>课文背景</a:t>
+              <a:t>背景 · 权威调研</a:t>
             </a:r>
           </a:p>
         </p:txBody>
@@ -4559,7 +4441,7 @@
             <a:avLst/>
           </a:prstGeom>
           <a:solidFill>
-            <a:srgbClr val="2E7D6B"/>
+            <a:srgbClr val="B23A2A"/>
           </a:solidFill>
           <a:ln>
             <a:noFill/>
@@ -4596,8 +4478,8 @@
         </p:nvSpPr>
         <p:spPr>
           <a:xfrm>
-            <a:off x="640080" y="1508760"/>
-            <a:ext cx="6766560" cy="4572000"/>
+            <a:off x="640080" y="1325880"/>
+            <a:ext cx="10058400" cy="640080"/>
           </a:xfrm>
           <a:prstGeom prst="rect">
             <a:avLst/>
@@ -4610,63 +4492,296 @@
           </a:bodyPr>
           <a:lstStyle/>
           <a:p>
+            <a:pPr algn="l"/>
+            <a:r>
+              <a:rPr sz="3000" b="1">
+                <a:solidFill>
+                  <a:srgbClr val="1C2A33"/>
+                </a:solidFill>
+                <a:latin typeface="楷体"/>
+                <a:ea typeface="楷体"/>
+                <a:cs typeface="楷体"/>
+              </a:rPr>
+              <a:t>教材定位与来源</a:t>
+            </a:r>
+          </a:p>
+        </p:txBody>
+      </p:sp>
+      <p:sp>
+        <p:nvSpPr>
+          <p:cNvPr id="6" name="TextBox 5"/>
+          <p:cNvSpPr txBox="1"/>
+          <p:nvPr/>
+        </p:nvSpPr>
+        <p:spPr>
+          <a:xfrm>
+            <a:off x="640080" y="1828800"/>
+            <a:ext cx="5227167" cy="457200"/>
+          </a:xfrm>
+          <a:prstGeom prst="rect">
+            <a:avLst/>
+          </a:prstGeom>
+          <a:noFill/>
+        </p:spPr>
+        <p:txBody>
+          <a:bodyPr wrap="square" anchor="t" lIns="0" rIns="0" tIns="0" bIns="0">
+            <a:spAutoFit/>
+          </a:bodyPr>
+          <a:lstStyle/>
+          <a:p>
+            <a:pPr algn="l"/>
+            <a:r>
+              <a:rPr sz="1800" b="1">
+                <a:solidFill>
+                  <a:srgbClr val="B23A2A"/>
+                </a:solidFill>
+                <a:latin typeface="楷体"/>
+                <a:ea typeface="楷体"/>
+                <a:cs typeface="楷体"/>
+              </a:rPr>
+              <a:t>教材分析</a:t>
+            </a:r>
+          </a:p>
+        </p:txBody>
+      </p:sp>
+      <p:sp>
+        <p:nvSpPr>
+          <p:cNvPr id="7" name="TextBox 6"/>
+          <p:cNvSpPr txBox="1"/>
+          <p:nvPr/>
+        </p:nvSpPr>
+        <p:spPr>
+          <a:xfrm>
+            <a:off x="640080" y="2331720"/>
+            <a:ext cx="5227167" cy="3657600"/>
+          </a:xfrm>
+          <a:prstGeom prst="rect">
+            <a:avLst/>
+          </a:prstGeom>
+          <a:noFill/>
+        </p:spPr>
+        <p:txBody>
+          <a:bodyPr wrap="square" anchor="t" lIns="0" rIns="0" tIns="0" bIns="0">
+            <a:spAutoFit/>
+          </a:bodyPr>
+          <a:lstStyle/>
+          <a:p>
             <a:pPr algn="l">
               <a:lnSpc>
                 <a:spcPct val="150000"/>
+              </a:lnSpc>
+            </a:pPr>
+            <a:r>
+              <a:rPr sz="1350" b="0">
+                <a:solidFill>
+                  <a:srgbClr val="1C2A33"/>
+                </a:solidFill>
+                <a:latin typeface="楷体"/>
+                <a:ea typeface="楷体"/>
+                <a:cs typeface="楷体"/>
+              </a:rPr>
+              <a:t>本课探成语：来源（神话/历史/寓言/诗文，如精卫填海/负荆请罪/守株待兔/学而不厌）、结构（四字为主、并列/主谓/动宾等）、运用（看对象/看色彩/不望文生义）。成语是汉语浓缩的文化结晶，用对增色，用错减分。</a:t>
+            </a:r>
+          </a:p>
+        </p:txBody>
+      </p:sp>
+      <p:sp>
+        <p:nvSpPr>
+          <p:cNvPr id="8" name="Rounded Rectangle 7"/>
+          <p:cNvSpPr/>
+          <p:nvPr/>
+        </p:nvSpPr>
+        <p:spPr>
+          <a:xfrm>
+            <a:off x="6324447" y="1828800"/>
+            <a:ext cx="5227167" cy="4023360"/>
+          </a:xfrm>
+          <a:prstGeom prst="roundRect">
+            <a:avLst/>
+          </a:prstGeom>
+          <a:solidFill>
+            <a:srgbClr val="1C2A33"/>
+          </a:solidFill>
+          <a:effectLst/>
+        </p:spPr>
+        <p:style>
+          <a:lnRef idx="1">
+            <a:schemeClr val="accent1"/>
+          </a:lnRef>
+          <a:fillRef idx="3">
+            <a:schemeClr val="accent1"/>
+          </a:fillRef>
+          <a:effectRef idx="2">
+            <a:schemeClr val="accent1"/>
+          </a:effectRef>
+          <a:fontRef idx="minor">
+            <a:schemeClr val="lt1"/>
+          </a:fontRef>
+        </p:style>
+        <p:txBody>
+          <a:bodyPr rtlCol="0" anchor="ctr"/>
+          <a:lstStyle/>
+          <a:p>
+            <a:pPr algn="ctr"/>
+          </a:p>
+        </p:txBody>
+      </p:sp>
+      <p:sp>
+        <p:nvSpPr>
+          <p:cNvPr id="9" name="TextBox 8"/>
+          <p:cNvSpPr txBox="1"/>
+          <p:nvPr/>
+        </p:nvSpPr>
+        <p:spPr>
+          <a:xfrm>
+            <a:off x="6598767" y="2011680"/>
+            <a:ext cx="4678527" cy="457200"/>
+          </a:xfrm>
+          <a:prstGeom prst="rect">
+            <a:avLst/>
+          </a:prstGeom>
+          <a:noFill/>
+        </p:spPr>
+        <p:txBody>
+          <a:bodyPr wrap="square" anchor="t" lIns="0" rIns="0" tIns="0" bIns="0">
+            <a:spAutoFit/>
+          </a:bodyPr>
+          <a:lstStyle/>
+          <a:p>
+            <a:pPr algn="l"/>
+            <a:r>
+              <a:rPr sz="1600" b="1">
+                <a:solidFill>
+                  <a:srgbClr val="C8A86B"/>
+                </a:solidFill>
+                <a:latin typeface="楷体"/>
+                <a:ea typeface="楷体"/>
+                <a:cs typeface="楷体"/>
+              </a:rPr>
+              <a:t>权威来源</a:t>
+            </a:r>
+          </a:p>
+        </p:txBody>
+      </p:sp>
+      <p:sp>
+        <p:nvSpPr>
+          <p:cNvPr id="10" name="TextBox 9"/>
+          <p:cNvSpPr txBox="1"/>
+          <p:nvPr/>
+        </p:nvSpPr>
+        <p:spPr>
+          <a:xfrm>
+            <a:off x="6598767" y="2560320"/>
+            <a:ext cx="4678527" cy="2377440"/>
+          </a:xfrm>
+          <a:prstGeom prst="rect">
+            <a:avLst/>
+          </a:prstGeom>
+          <a:noFill/>
+        </p:spPr>
+        <p:txBody>
+          <a:bodyPr wrap="square" anchor="t" lIns="0" rIns="0" tIns="0" bIns="0">
+            <a:spAutoFit/>
+          </a:bodyPr>
+          <a:lstStyle/>
+          <a:p>
+            <a:pPr algn="l">
+              <a:lnSpc>
+                <a:spcPct val="145000"/>
               </a:lnSpc>
               <a:spcAft>
                 <a:spcPts val="600"/>
               </a:spcAft>
             </a:pPr>
             <a:r>
-              <a:rPr sz="1600" b="0">
-                <a:solidFill>
-                  <a:srgbClr val="1C2A33"/>
+              <a:rPr sz="1250" b="0">
+                <a:solidFill>
+                  <a:srgbClr val="FFFFFF"/>
                 </a:solidFill>
                 <a:latin typeface="楷体"/>
                 <a:ea typeface="楷体"/>
                 <a:cs typeface="楷体"/>
               </a:rPr>
-              <a:t>本课探成语：来源（神话/历史/寓言/诗文，如精卫填海/负荆请罪/守株待兔/学而不厌）、结构（四字为主、并列/主谓/动宾等）、运用（看对象/看色彩/不望文生义）。成语是汉语浓缩的文化结晶，用对增色，用错减分。</a:t>
-            </a:r>
-          </a:p>
-        </p:txBody>
-      </p:sp>
-      <p:pic>
-        <p:nvPicPr>
-          <p:cNvPr id="6" name="Picture 5" descr="typewriter.jpg"/>
-          <p:cNvPicPr>
-            <a:picLocks noChangeAspect="1"/>
-          </p:cNvPicPr>
-          <p:nvPr/>
-        </p:nvPicPr>
-        <p:blipFill>
-          <a:blip r:embed="rId2"/>
-          <a:srcRect l="5860" r="5860"/>
-          <a:stretch>
-            <a:fillRect/>
-          </a:stretch>
-        </p:blipFill>
-        <p:spPr>
-          <a:xfrm>
-            <a:off x="8046720" y="1508760"/>
-            <a:ext cx="4114800" cy="3108960"/>
-          </a:xfrm>
-          <a:prstGeom prst="rect">
-            <a:avLst/>
-          </a:prstGeom>
-        </p:spPr>
-      </p:pic>
-      <p:sp>
-        <p:nvSpPr>
-          <p:cNvPr id="7" name="TextBox 6"/>
+              <a:t>人民日报海外版《成语可以这样学》（2016-08-27）</a:t>
+            </a:r>
+          </a:p>
+          <a:p>
+            <a:pPr algn="l">
+              <a:lnSpc>
+                <a:spcPct val="145000"/>
+              </a:lnSpc>
+              <a:spcAft>
+                <a:spcPts val="600"/>
+              </a:spcAft>
+            </a:pPr>
+            <a:r>
+              <a:rPr sz="1250" b="0">
+                <a:solidFill>
+                  <a:srgbClr val="FFFFFF"/>
+                </a:solidFill>
+                <a:latin typeface="楷体"/>
+                <a:ea typeface="楷体"/>
+                <a:cs typeface="楷体"/>
+              </a:rPr>
+              <a:t>人民教育出版社·统编版必修上第八单元课件（21世纪教育网）</a:t>
+            </a:r>
+          </a:p>
+        </p:txBody>
+      </p:sp>
+      <p:sp>
+        <p:nvSpPr>
+          <p:cNvPr id="11" name="Rectangle 10"/>
+          <p:cNvSpPr/>
+          <p:nvPr/>
+        </p:nvSpPr>
+        <p:spPr>
+          <a:xfrm>
+            <a:off x="6598767" y="4343400"/>
+            <a:ext cx="4678527" cy="12700"/>
+          </a:xfrm>
+          <a:prstGeom prst="rect">
+            <a:avLst/>
+          </a:prstGeom>
+          <a:solidFill>
+            <a:srgbClr val="6B6258"/>
+          </a:solidFill>
+          <a:ln>
+            <a:noFill/>
+          </a:ln>
+          <a:effectLst/>
+        </p:spPr>
+        <p:style>
+          <a:lnRef idx="1">
+            <a:schemeClr val="accent1"/>
+          </a:lnRef>
+          <a:fillRef idx="3">
+            <a:schemeClr val="accent1"/>
+          </a:fillRef>
+          <a:effectRef idx="2">
+            <a:schemeClr val="accent1"/>
+          </a:effectRef>
+          <a:fontRef idx="minor">
+            <a:schemeClr val="lt1"/>
+          </a:fontRef>
+        </p:style>
+        <p:txBody>
+          <a:bodyPr rtlCol="0" anchor="ctr"/>
+          <a:lstStyle/>
+          <a:p>
+            <a:pPr algn="ctr"/>
+          </a:p>
+        </p:txBody>
+      </p:sp>
+      <p:sp>
+        <p:nvSpPr>
+          <p:cNvPr id="12" name="TextBox 11"/>
           <p:cNvSpPr txBox="1"/>
           <p:nvPr/>
         </p:nvSpPr>
         <p:spPr>
           <a:xfrm>
-            <a:off x="8046720" y="4663440"/>
-            <a:ext cx="4114800" cy="365760"/>
+            <a:off x="6598767" y="4480560"/>
+            <a:ext cx="4678527" cy="1280160"/>
           </a:xfrm>
           <a:prstGeom prst="rect">
             <a:avLst/>
@@ -4679,24 +4794,28 @@
           </a:bodyPr>
           <a:lstStyle/>
           <a:p>
-            <a:pPr algn="ctr"/>
-            <a:r>
-              <a:rPr sz="1100" b="0">
-                <a:solidFill>
-                  <a:srgbClr val="6B6258"/>
-                </a:solidFill>
-                <a:latin typeface="微软雅黑"/>
-                <a:ea typeface="微软雅黑"/>
-                <a:cs typeface="微软雅黑"/>
+            <a:pPr algn="l">
+              <a:lnSpc>
+                <a:spcPct val="140000"/>
+              </a:lnSpc>
+            </a:pPr>
+            <a:r>
+              <a:rPr sz="1200" b="0">
+                <a:solidFill>
+                  <a:srgbClr val="E7DFD2"/>
+                </a:solidFill>
+                <a:latin typeface="楷体"/>
+                <a:ea typeface="楷体"/>
+                <a:cs typeface="楷体"/>
               </a:rPr>
-              <a:t>资料图（自由授权，复用 typewriter.jpg）</a:t>
-            </a:r>
-          </a:p>
-        </p:txBody>
-      </p:sp>
-      <p:sp>
-        <p:nvSpPr>
-          <p:cNvPr id="8" name="TextBox 7"/>
+              <a:t>本课件未使用无关配图，画面以学科色块呈现。</a:t>
+            </a:r>
+          </a:p>
+        </p:txBody>
+      </p:sp>
+      <p:sp>
+        <p:nvSpPr>
+          <p:cNvPr id="13" name="TextBox 12"/>
           <p:cNvSpPr txBox="1"/>
           <p:nvPr/>
         </p:nvSpPr>
@@ -4829,7 +4948,7 @@
                 <a:ea typeface="微软雅黑"/>
                 <a:cs typeface="微软雅黑"/>
               </a:rPr>
-              <a:t>学习重点</a:t>
+              <a:t>重点</a:t>
             </a:r>
           </a:p>
         </p:txBody>
@@ -4880,14 +4999,51 @@
       </p:sp>
       <p:sp>
         <p:nvSpPr>
-          <p:cNvPr id="5" name="Rounded Rectangle 4"/>
+          <p:cNvPr id="5" name="TextBox 4"/>
+          <p:cNvSpPr txBox="1"/>
+          <p:nvPr/>
+        </p:nvSpPr>
+        <p:spPr>
+          <a:xfrm>
+            <a:off x="640080" y="1325880"/>
+            <a:ext cx="10058400" cy="640080"/>
+          </a:xfrm>
+          <a:prstGeom prst="rect">
+            <a:avLst/>
+          </a:prstGeom>
+          <a:noFill/>
+        </p:spPr>
+        <p:txBody>
+          <a:bodyPr wrap="square" anchor="t" lIns="0" rIns="0" tIns="0" bIns="0">
+            <a:spAutoFit/>
+          </a:bodyPr>
+          <a:lstStyle/>
+          <a:p>
+            <a:pPr algn="l"/>
+            <a:r>
+              <a:rPr sz="3000" b="1">
+                <a:solidFill>
+                  <a:srgbClr val="1C2A33"/>
+                </a:solidFill>
+                <a:latin typeface="楷体"/>
+                <a:ea typeface="楷体"/>
+                <a:cs typeface="楷体"/>
+              </a:rPr>
+              <a:t>本课重点</a:t>
+            </a:r>
+          </a:p>
+        </p:txBody>
+      </p:sp>
+      <p:sp>
+        <p:nvSpPr>
+          <p:cNvPr id="6" name="Rounded Rectangle 5"/>
           <p:cNvSpPr/>
           <p:nvPr/>
         </p:nvSpPr>
         <p:spPr>
           <a:xfrm>
-            <a:off x="640080" y="1371600"/>
-            <a:ext cx="10911535" cy="1597152"/>
+            <a:off x="640080" y="2194560"/>
+            <a:ext cx="3393338" cy="3931920"/>
           </a:xfrm>
           <a:prstGeom prst="roundRect">
             <a:avLst/>
@@ -4895,7 +5051,343 @@
           <a:solidFill>
             <a:srgbClr val="FFFFFF"/>
           </a:solidFill>
-          <a:ln w="22860">
+          <a:ln w="20320">
+            <a:solidFill>
+              <a:srgbClr val="B23A2A"/>
+            </a:solidFill>
+          </a:ln>
+          <a:effectLst/>
+        </p:spPr>
+        <p:style>
+          <a:lnRef idx="1">
+            <a:schemeClr val="accent1"/>
+          </a:lnRef>
+          <a:fillRef idx="3">
+            <a:schemeClr val="accent1"/>
+          </a:fillRef>
+          <a:effectRef idx="2">
+            <a:schemeClr val="accent1"/>
+          </a:effectRef>
+          <a:fontRef idx="minor">
+            <a:schemeClr val="lt1"/>
+          </a:fontRef>
+        </p:style>
+        <p:txBody>
+          <a:bodyPr rtlCol="0" anchor="ctr"/>
+          <a:lstStyle/>
+          <a:p>
+            <a:pPr algn="ctr"/>
+          </a:p>
+        </p:txBody>
+      </p:sp>
+      <p:sp>
+        <p:nvSpPr>
+          <p:cNvPr id="7" name="Rectangle 6"/>
+          <p:cNvSpPr/>
+          <p:nvPr/>
+        </p:nvSpPr>
+        <p:spPr>
+          <a:xfrm>
+            <a:off x="640080" y="2194560"/>
+            <a:ext cx="3393338" cy="548640"/>
+          </a:xfrm>
+          <a:prstGeom prst="rect">
+            <a:avLst/>
+          </a:prstGeom>
+          <a:solidFill>
+            <a:srgbClr val="B23A2A"/>
+          </a:solidFill>
+          <a:ln>
+            <a:noFill/>
+          </a:ln>
+          <a:effectLst/>
+        </p:spPr>
+        <p:style>
+          <a:lnRef idx="1">
+            <a:schemeClr val="accent1"/>
+          </a:lnRef>
+          <a:fillRef idx="3">
+            <a:schemeClr val="accent1"/>
+          </a:fillRef>
+          <a:effectRef idx="2">
+            <a:schemeClr val="accent1"/>
+          </a:effectRef>
+          <a:fontRef idx="minor">
+            <a:schemeClr val="lt1"/>
+          </a:fontRef>
+        </p:style>
+        <p:txBody>
+          <a:bodyPr rtlCol="0" anchor="ctr"/>
+          <a:lstStyle/>
+          <a:p>
+            <a:pPr algn="ctr"/>
+          </a:p>
+        </p:txBody>
+      </p:sp>
+      <p:sp>
+        <p:nvSpPr>
+          <p:cNvPr id="8" name="TextBox 7"/>
+          <p:cNvSpPr txBox="1"/>
+          <p:nvPr/>
+        </p:nvSpPr>
+        <p:spPr>
+          <a:xfrm>
+            <a:off x="640080" y="2304288"/>
+            <a:ext cx="3393338" cy="365760"/>
+          </a:xfrm>
+          <a:prstGeom prst="rect">
+            <a:avLst/>
+          </a:prstGeom>
+          <a:noFill/>
+        </p:spPr>
+        <p:txBody>
+          <a:bodyPr wrap="square" anchor="t" lIns="0" rIns="0" tIns="0" bIns="0">
+            <a:spAutoFit/>
+          </a:bodyPr>
+          <a:lstStyle/>
+          <a:p>
+            <a:pPr algn="ctr"/>
+            <a:r>
+              <a:rPr sz="1500" b="1">
+                <a:solidFill>
+                  <a:srgbClr val="FFFFFF"/>
+                </a:solidFill>
+                <a:latin typeface="微软雅黑"/>
+                <a:ea typeface="微软雅黑"/>
+                <a:cs typeface="微软雅黑"/>
+              </a:rPr>
+              <a:t>重点 1</a:t>
+            </a:r>
+          </a:p>
+        </p:txBody>
+      </p:sp>
+      <p:sp>
+        <p:nvSpPr>
+          <p:cNvPr id="9" name="TextBox 8"/>
+          <p:cNvSpPr txBox="1"/>
+          <p:nvPr/>
+        </p:nvSpPr>
+        <p:spPr>
+          <a:xfrm>
+            <a:off x="914400" y="2971800"/>
+            <a:ext cx="2844698" cy="3017520"/>
+          </a:xfrm>
+          <a:prstGeom prst="rect">
+            <a:avLst/>
+          </a:prstGeom>
+          <a:noFill/>
+        </p:spPr>
+        <p:txBody>
+          <a:bodyPr wrap="square" anchor="t" lIns="0" rIns="0" tIns="0" bIns="0">
+            <a:spAutoFit/>
+          </a:bodyPr>
+          <a:lstStyle/>
+          <a:p>
+            <a:pPr algn="ctr">
+              <a:lnSpc>
+                <a:spcPct val="150000"/>
+              </a:lnSpc>
+            </a:pPr>
+            <a:r>
+              <a:rPr sz="1400" b="0">
+                <a:solidFill>
+                  <a:srgbClr val="1C2A33"/>
+                </a:solidFill>
+                <a:latin typeface="楷体"/>
+                <a:ea typeface="楷体"/>
+                <a:cs typeface="楷体"/>
+              </a:rPr>
+              <a:t>来源四类：神话/历史/寓言/诗文。</a:t>
+            </a:r>
+          </a:p>
+        </p:txBody>
+      </p:sp>
+      <p:sp>
+        <p:nvSpPr>
+          <p:cNvPr id="10" name="Rounded Rectangle 9"/>
+          <p:cNvSpPr/>
+          <p:nvPr/>
+        </p:nvSpPr>
+        <p:spPr>
+          <a:xfrm>
+            <a:off x="4399178" y="2194560"/>
+            <a:ext cx="3393338" cy="3931920"/>
+          </a:xfrm>
+          <a:prstGeom prst="roundRect">
+            <a:avLst/>
+          </a:prstGeom>
+          <a:solidFill>
+            <a:srgbClr val="FFFFFF"/>
+          </a:solidFill>
+          <a:ln w="20320">
+            <a:solidFill>
+              <a:srgbClr val="2E7D6B"/>
+            </a:solidFill>
+          </a:ln>
+          <a:effectLst/>
+        </p:spPr>
+        <p:style>
+          <a:lnRef idx="1">
+            <a:schemeClr val="accent1"/>
+          </a:lnRef>
+          <a:fillRef idx="3">
+            <a:schemeClr val="accent1"/>
+          </a:fillRef>
+          <a:effectRef idx="2">
+            <a:schemeClr val="accent1"/>
+          </a:effectRef>
+          <a:fontRef idx="minor">
+            <a:schemeClr val="lt1"/>
+          </a:fontRef>
+        </p:style>
+        <p:txBody>
+          <a:bodyPr rtlCol="0" anchor="ctr"/>
+          <a:lstStyle/>
+          <a:p>
+            <a:pPr algn="ctr"/>
+          </a:p>
+        </p:txBody>
+      </p:sp>
+      <p:sp>
+        <p:nvSpPr>
+          <p:cNvPr id="11" name="Rectangle 10"/>
+          <p:cNvSpPr/>
+          <p:nvPr/>
+        </p:nvSpPr>
+        <p:spPr>
+          <a:xfrm>
+            <a:off x="4399178" y="2194560"/>
+            <a:ext cx="3393338" cy="548640"/>
+          </a:xfrm>
+          <a:prstGeom prst="rect">
+            <a:avLst/>
+          </a:prstGeom>
+          <a:solidFill>
+            <a:srgbClr val="2E7D6B"/>
+          </a:solidFill>
+          <a:ln>
+            <a:noFill/>
+          </a:ln>
+          <a:effectLst/>
+        </p:spPr>
+        <p:style>
+          <a:lnRef idx="1">
+            <a:schemeClr val="accent1"/>
+          </a:lnRef>
+          <a:fillRef idx="3">
+            <a:schemeClr val="accent1"/>
+          </a:fillRef>
+          <a:effectRef idx="2">
+            <a:schemeClr val="accent1"/>
+          </a:effectRef>
+          <a:fontRef idx="minor">
+            <a:schemeClr val="lt1"/>
+          </a:fontRef>
+        </p:style>
+        <p:txBody>
+          <a:bodyPr rtlCol="0" anchor="ctr"/>
+          <a:lstStyle/>
+          <a:p>
+            <a:pPr algn="ctr"/>
+          </a:p>
+        </p:txBody>
+      </p:sp>
+      <p:sp>
+        <p:nvSpPr>
+          <p:cNvPr id="12" name="TextBox 11"/>
+          <p:cNvSpPr txBox="1"/>
+          <p:nvPr/>
+        </p:nvSpPr>
+        <p:spPr>
+          <a:xfrm>
+            <a:off x="4399178" y="2304288"/>
+            <a:ext cx="3393338" cy="365760"/>
+          </a:xfrm>
+          <a:prstGeom prst="rect">
+            <a:avLst/>
+          </a:prstGeom>
+          <a:noFill/>
+        </p:spPr>
+        <p:txBody>
+          <a:bodyPr wrap="square" anchor="t" lIns="0" rIns="0" tIns="0" bIns="0">
+            <a:spAutoFit/>
+          </a:bodyPr>
+          <a:lstStyle/>
+          <a:p>
+            <a:pPr algn="ctr"/>
+            <a:r>
+              <a:rPr sz="1500" b="1">
+                <a:solidFill>
+                  <a:srgbClr val="FFFFFF"/>
+                </a:solidFill>
+                <a:latin typeface="微软雅黑"/>
+                <a:ea typeface="微软雅黑"/>
+                <a:cs typeface="微软雅黑"/>
+              </a:rPr>
+              <a:t>重点 2</a:t>
+            </a:r>
+          </a:p>
+        </p:txBody>
+      </p:sp>
+      <p:sp>
+        <p:nvSpPr>
+          <p:cNvPr id="13" name="TextBox 12"/>
+          <p:cNvSpPr txBox="1"/>
+          <p:nvPr/>
+        </p:nvSpPr>
+        <p:spPr>
+          <a:xfrm>
+            <a:off x="4673498" y="2971800"/>
+            <a:ext cx="2844698" cy="3017520"/>
+          </a:xfrm>
+          <a:prstGeom prst="rect">
+            <a:avLst/>
+          </a:prstGeom>
+          <a:noFill/>
+        </p:spPr>
+        <p:txBody>
+          <a:bodyPr wrap="square" anchor="t" lIns="0" rIns="0" tIns="0" bIns="0">
+            <a:spAutoFit/>
+          </a:bodyPr>
+          <a:lstStyle/>
+          <a:p>
+            <a:pPr algn="ctr">
+              <a:lnSpc>
+                <a:spcPct val="150000"/>
+              </a:lnSpc>
+            </a:pPr>
+            <a:r>
+              <a:rPr sz="1400" b="0">
+                <a:solidFill>
+                  <a:srgbClr val="1C2A33"/>
+                </a:solidFill>
+                <a:latin typeface="楷体"/>
+                <a:ea typeface="楷体"/>
+                <a:cs typeface="楷体"/>
+              </a:rPr>
+              <a:t>结构：四字为主（并列/主谓/动宾）。</a:t>
+            </a:r>
+          </a:p>
+        </p:txBody>
+      </p:sp>
+      <p:sp>
+        <p:nvSpPr>
+          <p:cNvPr id="14" name="Rounded Rectangle 13"/>
+          <p:cNvSpPr/>
+          <p:nvPr/>
+        </p:nvSpPr>
+        <p:spPr>
+          <a:xfrm>
+            <a:off x="8158276" y="2194560"/>
+            <a:ext cx="3393338" cy="3931920"/>
+          </a:xfrm>
+          <a:prstGeom prst="roundRect">
+            <a:avLst/>
+          </a:prstGeom>
+          <a:solidFill>
+            <a:srgbClr val="FFFFFF"/>
+          </a:solidFill>
+          <a:ln w="20320">
             <a:solidFill>
               <a:srgbClr val="C8A86B"/>
             </a:solidFill>
@@ -4926,107 +5418,23 @@
       </p:sp>
       <p:sp>
         <p:nvSpPr>
-          <p:cNvPr id="6" name="TextBox 5"/>
-          <p:cNvSpPr txBox="1"/>
-          <p:nvPr/>
-        </p:nvSpPr>
-        <p:spPr>
-          <a:xfrm>
-            <a:off x="1371600" y="1481328"/>
-            <a:ext cx="9997135" cy="457200"/>
-          </a:xfrm>
-          <a:prstGeom prst="rect">
-            <a:avLst/>
-          </a:prstGeom>
-          <a:noFill/>
-        </p:spPr>
-        <p:txBody>
-          <a:bodyPr wrap="square" anchor="t" lIns="0" rIns="0" tIns="0" bIns="0">
-            <a:spAutoFit/>
-          </a:bodyPr>
-          <a:lstStyle/>
-          <a:p>
-            <a:pPr algn="l">
-              <a:lnSpc>
-                <a:spcPct val="110000"/>
-              </a:lnSpc>
-            </a:pPr>
-            <a:r>
-              <a:rPr sz="1600" b="1">
-                <a:solidFill>
-                  <a:srgbClr val="1C2A33"/>
-                </a:solidFill>
-                <a:latin typeface="微软雅黑"/>
-                <a:ea typeface="微软雅黑"/>
-                <a:cs typeface="微软雅黑"/>
-              </a:rPr>
-              <a:t/>
-            </a:r>
-          </a:p>
-        </p:txBody>
-      </p:sp>
-      <p:sp>
-        <p:nvSpPr>
-          <p:cNvPr id="7" name="TextBox 6"/>
-          <p:cNvSpPr txBox="1"/>
-          <p:nvPr/>
-        </p:nvSpPr>
-        <p:spPr>
-          <a:xfrm>
-            <a:off x="1371600" y="1920240"/>
-            <a:ext cx="9997135" cy="957072"/>
-          </a:xfrm>
-          <a:prstGeom prst="rect">
-            <a:avLst/>
-          </a:prstGeom>
-          <a:noFill/>
-        </p:spPr>
-        <p:txBody>
-          <a:bodyPr wrap="square" anchor="t" lIns="0" rIns="0" tIns="0" bIns="0">
-            <a:spAutoFit/>
-          </a:bodyPr>
-          <a:lstStyle/>
-          <a:p>
-            <a:pPr algn="l">
-              <a:lnSpc>
-                <a:spcPct val="128000"/>
-              </a:lnSpc>
-            </a:pPr>
-            <a:r>
-              <a:rPr sz="1300" b="0">
-                <a:solidFill>
-                  <a:srgbClr val="1C2A33"/>
-                </a:solidFill>
-                <a:latin typeface="楷体"/>
-                <a:ea typeface="楷体"/>
-                <a:cs typeface="楷体"/>
-              </a:rPr>
-              <a:t>① 来源四类：神话/历史/寓言/诗文。</a:t>
-            </a:r>
-          </a:p>
-        </p:txBody>
-      </p:sp>
-      <p:sp>
-        <p:nvSpPr>
-          <p:cNvPr id="8" name="Rounded Rectangle 7"/>
+          <p:cNvPr id="15" name="Rectangle 14"/>
           <p:cNvSpPr/>
           <p:nvPr/>
         </p:nvSpPr>
         <p:spPr>
           <a:xfrm>
-            <a:off x="640080" y="3078480"/>
-            <a:ext cx="10911535" cy="1597152"/>
-          </a:xfrm>
-          <a:prstGeom prst="roundRect">
+            <a:off x="8158276" y="2194560"/>
+            <a:ext cx="3393338" cy="548640"/>
+          </a:xfrm>
+          <a:prstGeom prst="rect">
             <a:avLst/>
           </a:prstGeom>
           <a:solidFill>
-            <a:srgbClr val="FFFFFF"/>
+            <a:srgbClr val="C8A86B"/>
           </a:solidFill>
-          <a:ln w="22860">
-            <a:solidFill>
-              <a:srgbClr val="C8A86B"/>
-            </a:solidFill>
+          <a:ln>
+            <a:noFill/>
           </a:ln>
           <a:effectLst/>
         </p:spPr>
@@ -5054,14 +5462,14 @@
       </p:sp>
       <p:sp>
         <p:nvSpPr>
-          <p:cNvPr id="9" name="TextBox 8"/>
+          <p:cNvPr id="16" name="TextBox 15"/>
           <p:cNvSpPr txBox="1"/>
           <p:nvPr/>
         </p:nvSpPr>
         <p:spPr>
           <a:xfrm>
-            <a:off x="1371600" y="3188208"/>
-            <a:ext cx="9997135" cy="457200"/>
+            <a:off x="8158276" y="2304288"/>
+            <a:ext cx="3393338" cy="365760"/>
           </a:xfrm>
           <a:prstGeom prst="rect">
             <a:avLst/>
@@ -5074,35 +5482,31 @@
           </a:bodyPr>
           <a:lstStyle/>
           <a:p>
-            <a:pPr algn="l">
-              <a:lnSpc>
-                <a:spcPct val="110000"/>
-              </a:lnSpc>
-            </a:pPr>
-            <a:r>
-              <a:rPr sz="1600" b="1">
-                <a:solidFill>
-                  <a:srgbClr val="1C2A33"/>
+            <a:pPr algn="ctr"/>
+            <a:r>
+              <a:rPr sz="1500" b="1">
+                <a:solidFill>
+                  <a:srgbClr val="FFFFFF"/>
                 </a:solidFill>
                 <a:latin typeface="微软雅黑"/>
                 <a:ea typeface="微软雅黑"/>
                 <a:cs typeface="微软雅黑"/>
               </a:rPr>
-              <a:t/>
-            </a:r>
-          </a:p>
-        </p:txBody>
-      </p:sp>
-      <p:sp>
-        <p:nvSpPr>
-          <p:cNvPr id="10" name="TextBox 9"/>
+              <a:t>重点 3</a:t>
+            </a:r>
+          </a:p>
+        </p:txBody>
+      </p:sp>
+      <p:sp>
+        <p:nvSpPr>
+          <p:cNvPr id="17" name="TextBox 16"/>
           <p:cNvSpPr txBox="1"/>
           <p:nvPr/>
         </p:nvSpPr>
         <p:spPr>
           <a:xfrm>
-            <a:off x="1371600" y="3627120"/>
-            <a:ext cx="9997135" cy="957072"/>
+            <a:off x="8432596" y="2971800"/>
+            <a:ext cx="2844698" cy="3017520"/>
           </a:xfrm>
           <a:prstGeom prst="rect">
             <a:avLst/>
@@ -5115,13 +5519,13 @@
           </a:bodyPr>
           <a:lstStyle/>
           <a:p>
-            <a:pPr algn="l">
+            <a:pPr algn="ctr">
               <a:lnSpc>
-                <a:spcPct val="128000"/>
+                <a:spcPct val="150000"/>
               </a:lnSpc>
             </a:pPr>
             <a:r>
-              <a:rPr sz="1300" b="0">
+              <a:rPr sz="1400" b="0">
                 <a:solidFill>
                   <a:srgbClr val="1C2A33"/>
                 </a:solidFill>
@@ -5129,142 +5533,14 @@
                 <a:ea typeface="楷体"/>
                 <a:cs typeface="楷体"/>
               </a:rPr>
-              <a:t>② 结构：四字为主（并列/主谓/动宾）。</a:t>
-            </a:r>
-          </a:p>
-        </p:txBody>
-      </p:sp>
-      <p:sp>
-        <p:nvSpPr>
-          <p:cNvPr id="11" name="Rounded Rectangle 10"/>
-          <p:cNvSpPr/>
-          <p:nvPr/>
-        </p:nvSpPr>
-        <p:spPr>
-          <a:xfrm>
-            <a:off x="640080" y="4785360"/>
-            <a:ext cx="10911535" cy="1597152"/>
-          </a:xfrm>
-          <a:prstGeom prst="roundRect">
-            <a:avLst/>
-          </a:prstGeom>
-          <a:solidFill>
-            <a:srgbClr val="FFFFFF"/>
-          </a:solidFill>
-          <a:ln w="22860">
-            <a:solidFill>
-              <a:srgbClr val="C8A86B"/>
-            </a:solidFill>
-          </a:ln>
-          <a:effectLst/>
-        </p:spPr>
-        <p:style>
-          <a:lnRef idx="1">
-            <a:schemeClr val="accent1"/>
-          </a:lnRef>
-          <a:fillRef idx="3">
-            <a:schemeClr val="accent1"/>
-          </a:fillRef>
-          <a:effectRef idx="2">
-            <a:schemeClr val="accent1"/>
-          </a:effectRef>
-          <a:fontRef idx="minor">
-            <a:schemeClr val="lt1"/>
-          </a:fontRef>
-        </p:style>
-        <p:txBody>
-          <a:bodyPr rtlCol="0" anchor="ctr"/>
-          <a:lstStyle/>
-          <a:p>
-            <a:pPr algn="ctr"/>
-          </a:p>
-        </p:txBody>
-      </p:sp>
-      <p:sp>
-        <p:nvSpPr>
-          <p:cNvPr id="12" name="TextBox 11"/>
-          <p:cNvSpPr txBox="1"/>
-          <p:nvPr/>
-        </p:nvSpPr>
-        <p:spPr>
-          <a:xfrm>
-            <a:off x="1371600" y="4895088"/>
-            <a:ext cx="9997135" cy="457200"/>
-          </a:xfrm>
-          <a:prstGeom prst="rect">
-            <a:avLst/>
-          </a:prstGeom>
-          <a:noFill/>
-        </p:spPr>
-        <p:txBody>
-          <a:bodyPr wrap="square" anchor="t" lIns="0" rIns="0" tIns="0" bIns="0">
-            <a:spAutoFit/>
-          </a:bodyPr>
-          <a:lstStyle/>
-          <a:p>
-            <a:pPr algn="l">
-              <a:lnSpc>
-                <a:spcPct val="110000"/>
-              </a:lnSpc>
-            </a:pPr>
-            <a:r>
-              <a:rPr sz="1600" b="1">
-                <a:solidFill>
-                  <a:srgbClr val="1C2A33"/>
-                </a:solidFill>
-                <a:latin typeface="微软雅黑"/>
-                <a:ea typeface="微软雅黑"/>
-                <a:cs typeface="微软雅黑"/>
-              </a:rPr>
-              <a:t/>
-            </a:r>
-          </a:p>
-        </p:txBody>
-      </p:sp>
-      <p:sp>
-        <p:nvSpPr>
-          <p:cNvPr id="13" name="TextBox 12"/>
-          <p:cNvSpPr txBox="1"/>
-          <p:nvPr/>
-        </p:nvSpPr>
-        <p:spPr>
-          <a:xfrm>
-            <a:off x="1371600" y="5334000"/>
-            <a:ext cx="9997135" cy="957072"/>
-          </a:xfrm>
-          <a:prstGeom prst="rect">
-            <a:avLst/>
-          </a:prstGeom>
-          <a:noFill/>
-        </p:spPr>
-        <p:txBody>
-          <a:bodyPr wrap="square" anchor="t" lIns="0" rIns="0" tIns="0" bIns="0">
-            <a:spAutoFit/>
-          </a:bodyPr>
-          <a:lstStyle/>
-          <a:p>
-            <a:pPr algn="l">
-              <a:lnSpc>
-                <a:spcPct val="128000"/>
-              </a:lnSpc>
-            </a:pPr>
-            <a:r>
-              <a:rPr sz="1300" b="0">
-                <a:solidFill>
-                  <a:srgbClr val="1C2A33"/>
-                </a:solidFill>
-                <a:latin typeface="楷体"/>
-                <a:ea typeface="楷体"/>
-                <a:cs typeface="楷体"/>
-              </a:rPr>
-              <a:t>③ 误用三型：望文生义/对象错/色彩错。</a:t>
-            </a:r>
-          </a:p>
-        </p:txBody>
-      </p:sp>
-      <p:sp>
-        <p:nvSpPr>
-          <p:cNvPr id="14" name="TextBox 13"/>
+              <a:t>误用三型：望文生义/对象错/色彩错。</a:t>
+            </a:r>
+          </a:p>
+        </p:txBody>
+      </p:sp>
+      <p:sp>
+        <p:nvSpPr>
+          <p:cNvPr id="18" name="TextBox 17"/>
           <p:cNvSpPr txBox="1"/>
           <p:nvPr/>
         </p:nvSpPr>
@@ -5391,13 +5667,13 @@
             <a:r>
               <a:rPr sz="1300" b="1">
                 <a:solidFill>
-                  <a:srgbClr val="2E7D6B"/>
+                  <a:srgbClr val="B23A2A"/>
                 </a:solidFill>
                 <a:latin typeface="微软雅黑"/>
                 <a:ea typeface="微软雅黑"/>
                 <a:cs typeface="微软雅黑"/>
               </a:rPr>
-              <a:t>学习路径</a:t>
+              <a:t>方法</a:t>
             </a:r>
           </a:p>
         </p:txBody>
@@ -5417,7 +5693,7 @@
             <a:avLst/>
           </a:prstGeom>
           <a:solidFill>
-            <a:srgbClr val="2E7D6B"/>
+            <a:srgbClr val="B23A2A"/>
           </a:solidFill>
           <a:ln>
             <a:noFill/>
@@ -5448,14 +5724,259 @@
       </p:sp>
       <p:sp>
         <p:nvSpPr>
-          <p:cNvPr id="5" name="Rounded Rectangle 4"/>
+          <p:cNvPr id="5" name="TextBox 4"/>
+          <p:cNvSpPr txBox="1"/>
+          <p:nvPr/>
+        </p:nvSpPr>
+        <p:spPr>
+          <a:xfrm>
+            <a:off x="640080" y="1325880"/>
+            <a:ext cx="10058400" cy="640080"/>
+          </a:xfrm>
+          <a:prstGeom prst="rect">
+            <a:avLst/>
+          </a:prstGeom>
+          <a:noFill/>
+        </p:spPr>
+        <p:txBody>
+          <a:bodyPr wrap="square" anchor="t" lIns="0" rIns="0" tIns="0" bIns="0">
+            <a:spAutoFit/>
+          </a:bodyPr>
+          <a:lstStyle/>
+          <a:p>
+            <a:pPr algn="l"/>
+            <a:r>
+              <a:rPr sz="3000" b="1">
+                <a:solidFill>
+                  <a:srgbClr val="1C2A33"/>
+                </a:solidFill>
+                <a:latin typeface="楷体"/>
+                <a:ea typeface="楷体"/>
+                <a:cs typeface="楷体"/>
+              </a:rPr>
+              <a:t>学习路径</a:t>
+            </a:r>
+          </a:p>
+        </p:txBody>
+      </p:sp>
+      <p:sp>
+        <p:nvSpPr>
+          <p:cNvPr id="6" name="Rounded Rectangle 5"/>
           <p:cNvSpPr/>
           <p:nvPr/>
         </p:nvSpPr>
         <p:spPr>
           <a:xfrm>
-            <a:off x="640080" y="1371600"/>
-            <a:ext cx="10911535" cy="685800"/>
+            <a:off x="640080" y="2194560"/>
+            <a:ext cx="2453563" cy="3657600"/>
+          </a:xfrm>
+          <a:prstGeom prst="roundRect">
+            <a:avLst/>
+          </a:prstGeom>
+          <a:solidFill>
+            <a:srgbClr val="FFFFFF"/>
+          </a:solidFill>
+          <a:ln w="22860">
+            <a:solidFill>
+              <a:srgbClr val="B23A2A"/>
+            </a:solidFill>
+          </a:ln>
+          <a:effectLst/>
+        </p:spPr>
+        <p:style>
+          <a:lnRef idx="1">
+            <a:schemeClr val="accent1"/>
+          </a:lnRef>
+          <a:fillRef idx="3">
+            <a:schemeClr val="accent1"/>
+          </a:fillRef>
+          <a:effectRef idx="2">
+            <a:schemeClr val="accent1"/>
+          </a:effectRef>
+          <a:fontRef idx="minor">
+            <a:schemeClr val="lt1"/>
+          </a:fontRef>
+        </p:style>
+        <p:txBody>
+          <a:bodyPr rtlCol="0" anchor="ctr"/>
+          <a:lstStyle/>
+          <a:p>
+            <a:pPr algn="ctr"/>
+          </a:p>
+        </p:txBody>
+      </p:sp>
+      <p:sp>
+        <p:nvSpPr>
+          <p:cNvPr id="7" name="Oval 6"/>
+          <p:cNvSpPr/>
+          <p:nvPr/>
+        </p:nvSpPr>
+        <p:spPr>
+          <a:xfrm>
+            <a:off x="804672" y="2359152"/>
+            <a:ext cx="457200" cy="457200"/>
+          </a:xfrm>
+          <a:prstGeom prst="ellipse">
+            <a:avLst/>
+          </a:prstGeom>
+          <a:solidFill>
+            <a:srgbClr val="B23A2A"/>
+          </a:solidFill>
+          <a:ln>
+            <a:noFill/>
+          </a:ln>
+          <a:effectLst/>
+        </p:spPr>
+        <p:style>
+          <a:lnRef idx="1">
+            <a:schemeClr val="accent1"/>
+          </a:lnRef>
+          <a:fillRef idx="3">
+            <a:schemeClr val="accent1"/>
+          </a:fillRef>
+          <a:effectRef idx="2">
+            <a:schemeClr val="accent1"/>
+          </a:effectRef>
+          <a:fontRef idx="minor">
+            <a:schemeClr val="lt1"/>
+          </a:fontRef>
+        </p:style>
+        <p:txBody>
+          <a:bodyPr rtlCol="0" anchor="ctr"/>
+          <a:lstStyle/>
+          <a:p>
+            <a:pPr algn="ctr"/>
+          </a:p>
+        </p:txBody>
+      </p:sp>
+      <p:sp>
+        <p:nvSpPr>
+          <p:cNvPr id="8" name="TextBox 7"/>
+          <p:cNvSpPr txBox="1"/>
+          <p:nvPr/>
+        </p:nvSpPr>
+        <p:spPr>
+          <a:xfrm>
+            <a:off x="804672" y="2414016"/>
+            <a:ext cx="457200" cy="384048"/>
+          </a:xfrm>
+          <a:prstGeom prst="rect">
+            <a:avLst/>
+          </a:prstGeom>
+          <a:noFill/>
+        </p:spPr>
+        <p:txBody>
+          <a:bodyPr wrap="square" anchor="t" lIns="0" rIns="0" tIns="0" bIns="0">
+            <a:spAutoFit/>
+          </a:bodyPr>
+          <a:lstStyle/>
+          <a:p>
+            <a:pPr algn="ctr"/>
+            <a:r>
+              <a:rPr sz="1600" b="1">
+                <a:solidFill>
+                  <a:srgbClr val="FFFFFF"/>
+                </a:solidFill>
+                <a:latin typeface="微软雅黑"/>
+                <a:ea typeface="微软雅黑"/>
+                <a:cs typeface="微软雅黑"/>
+              </a:rPr>
+              <a:t>1</a:t>
+            </a:r>
+          </a:p>
+        </p:txBody>
+      </p:sp>
+      <p:sp>
+        <p:nvSpPr>
+          <p:cNvPr id="9" name="TextBox 8"/>
+          <p:cNvSpPr txBox="1"/>
+          <p:nvPr/>
+        </p:nvSpPr>
+        <p:spPr>
+          <a:xfrm>
+            <a:off x="1371600" y="2359152"/>
+            <a:ext cx="1539163" cy="457200"/>
+          </a:xfrm>
+          <a:prstGeom prst="rect">
+            <a:avLst/>
+          </a:prstGeom>
+          <a:noFill/>
+        </p:spPr>
+        <p:txBody>
+          <a:bodyPr wrap="square" anchor="t" lIns="0" rIns="0" tIns="0" bIns="0">
+            <a:spAutoFit/>
+          </a:bodyPr>
+          <a:lstStyle/>
+          <a:p>
+            <a:pPr algn="l"/>
+            <a:r>
+              <a:rPr sz="1700" b="1">
+                <a:solidFill>
+                  <a:srgbClr val="1C2A33"/>
+                </a:solidFill>
+                <a:latin typeface="微软雅黑"/>
+                <a:ea typeface="微软雅黑"/>
+                <a:cs typeface="微软雅黑"/>
+              </a:rPr>
+              <a:t>来源归类法</a:t>
+            </a:r>
+          </a:p>
+        </p:txBody>
+      </p:sp>
+      <p:sp>
+        <p:nvSpPr>
+          <p:cNvPr id="10" name="TextBox 9"/>
+          <p:cNvSpPr txBox="1"/>
+          <p:nvPr/>
+        </p:nvSpPr>
+        <p:spPr>
+          <a:xfrm>
+            <a:off x="1371600" y="2852928"/>
+            <a:ext cx="1539163" cy="2880360"/>
+          </a:xfrm>
+          <a:prstGeom prst="rect">
+            <a:avLst/>
+          </a:prstGeom>
+          <a:noFill/>
+        </p:spPr>
+        <p:txBody>
+          <a:bodyPr wrap="square" anchor="t" lIns="0" rIns="0" tIns="0" bIns="0">
+            <a:spAutoFit/>
+          </a:bodyPr>
+          <a:lstStyle/>
+          <a:p>
+            <a:pPr algn="l">
+              <a:lnSpc>
+                <a:spcPct val="140000"/>
+              </a:lnSpc>
+              <a:spcAft>
+                <a:spcPts val="400"/>
+              </a:spcAft>
+            </a:pPr>
+            <a:r>
+              <a:rPr sz="1400" b="0">
+                <a:solidFill>
+                  <a:srgbClr val="1C2A33"/>
+                </a:solidFill>
+                <a:latin typeface="楷体"/>
+                <a:ea typeface="楷体"/>
+                <a:cs typeface="楷体"/>
+              </a:rPr>
+              <a:t/>
+            </a:r>
+          </a:p>
+        </p:txBody>
+      </p:sp>
+      <p:sp>
+        <p:nvSpPr>
+          <p:cNvPr id="11" name="Rounded Rectangle 10"/>
+          <p:cNvSpPr/>
+          <p:nvPr/>
+        </p:nvSpPr>
+        <p:spPr>
+          <a:xfrm>
+            <a:off x="3459403" y="2194560"/>
+            <a:ext cx="2453563" cy="3657600"/>
           </a:xfrm>
           <a:prstGeom prst="roundRect">
             <a:avLst/>
@@ -5494,13 +6015,13 @@
       </p:sp>
       <p:sp>
         <p:nvSpPr>
-          <p:cNvPr id="6" name="Oval 5"/>
+          <p:cNvPr id="12" name="Oval 11"/>
           <p:cNvSpPr/>
           <p:nvPr/>
         </p:nvSpPr>
         <p:spPr>
           <a:xfrm>
-            <a:off x="804672" y="1536192"/>
+            <a:off x="3623995" y="2359152"/>
             <a:ext cx="457200" cy="457200"/>
           </a:xfrm>
           <a:prstGeom prst="ellipse">
@@ -5538,13 +6059,13 @@
       </p:sp>
       <p:sp>
         <p:nvSpPr>
-          <p:cNvPr id="7" name="TextBox 6"/>
+          <p:cNvPr id="13" name="TextBox 12"/>
           <p:cNvSpPr txBox="1"/>
           <p:nvPr/>
         </p:nvSpPr>
         <p:spPr>
           <a:xfrm>
-            <a:off x="804672" y="1591056"/>
+            <a:off x="3623995" y="2414016"/>
             <a:ext cx="457200" cy="384048"/>
           </a:xfrm>
           <a:prstGeom prst="rect">
@@ -5568,21 +6089,21 @@
                 <a:ea typeface="微软雅黑"/>
                 <a:cs typeface="微软雅黑"/>
               </a:rPr>
-              <a:t>1</a:t>
-            </a:r>
-          </a:p>
-        </p:txBody>
-      </p:sp>
-      <p:sp>
-        <p:nvSpPr>
-          <p:cNvPr id="8" name="TextBox 7"/>
+              <a:t>2</a:t>
+            </a:r>
+          </a:p>
+        </p:txBody>
+      </p:sp>
+      <p:sp>
+        <p:nvSpPr>
+          <p:cNvPr id="14" name="TextBox 13"/>
           <p:cNvSpPr txBox="1"/>
           <p:nvPr/>
         </p:nvSpPr>
         <p:spPr>
           <a:xfrm>
-            <a:off x="1371600" y="1481328"/>
-            <a:ext cx="9997135" cy="484632"/>
+            <a:off x="4190923" y="2359152"/>
+            <a:ext cx="1539163" cy="457200"/>
           </a:xfrm>
           <a:prstGeom prst="rect">
             <a:avLst/>
@@ -5595,13 +6116,9 @@
           </a:bodyPr>
           <a:lstStyle/>
           <a:p>
-            <a:pPr algn="l">
-              <a:lnSpc>
-                <a:spcPct val="110000"/>
-              </a:lnSpc>
-            </a:pPr>
-            <a:r>
-              <a:rPr sz="1600" b="1">
+            <a:pPr algn="l"/>
+            <a:r>
+              <a:rPr sz="1700" b="1">
                 <a:solidFill>
                   <a:srgbClr val="1C2A33"/>
                 </a:solidFill>
@@ -5609,21 +6126,65 @@
                 <a:ea typeface="微软雅黑"/>
                 <a:cs typeface="微软雅黑"/>
               </a:rPr>
-              <a:t>Step 1 导入</a:t>
-            </a:r>
-          </a:p>
-        </p:txBody>
-      </p:sp>
-      <p:sp>
-        <p:nvSpPr>
-          <p:cNvPr id="9" name="Rounded Rectangle 8"/>
+              <a:t>结构图法</a:t>
+            </a:r>
+          </a:p>
+        </p:txBody>
+      </p:sp>
+      <p:sp>
+        <p:nvSpPr>
+          <p:cNvPr id="15" name="TextBox 14"/>
+          <p:cNvSpPr txBox="1"/>
+          <p:nvPr/>
+        </p:nvSpPr>
+        <p:spPr>
+          <a:xfrm>
+            <a:off x="4190923" y="2852928"/>
+            <a:ext cx="1539163" cy="2880360"/>
+          </a:xfrm>
+          <a:prstGeom prst="rect">
+            <a:avLst/>
+          </a:prstGeom>
+          <a:noFill/>
+        </p:spPr>
+        <p:txBody>
+          <a:bodyPr wrap="square" anchor="t" lIns="0" rIns="0" tIns="0" bIns="0">
+            <a:spAutoFit/>
+          </a:bodyPr>
+          <a:lstStyle/>
+          <a:p>
+            <a:pPr algn="l">
+              <a:lnSpc>
+                <a:spcPct val="140000"/>
+              </a:lnSpc>
+              <a:spcAft>
+                <a:spcPts val="400"/>
+              </a:spcAft>
+            </a:pPr>
+            <a:r>
+              <a:rPr sz="1400" b="0">
+                <a:solidFill>
+                  <a:srgbClr val="1C2A33"/>
+                </a:solidFill>
+                <a:latin typeface="楷体"/>
+                <a:ea typeface="楷体"/>
+                <a:cs typeface="楷体"/>
+              </a:rPr>
+              <a:t/>
+            </a:r>
+          </a:p>
+        </p:txBody>
+      </p:sp>
+      <p:sp>
+        <p:nvSpPr>
+          <p:cNvPr id="16" name="Rounded Rectangle 15"/>
           <p:cNvSpPr/>
           <p:nvPr/>
         </p:nvSpPr>
         <p:spPr>
           <a:xfrm>
-            <a:off x="640080" y="2194560"/>
-            <a:ext cx="10911535" cy="685800"/>
+            <a:off x="6278727" y="2194560"/>
+            <a:ext cx="2453563" cy="3657600"/>
           </a:xfrm>
           <a:prstGeom prst="roundRect">
             <a:avLst/>
@@ -5633,7 +6194,7 @@
           </a:solidFill>
           <a:ln w="22860">
             <a:solidFill>
-              <a:srgbClr val="2E7D6B"/>
+              <a:srgbClr val="C8A86B"/>
             </a:solidFill>
           </a:ln>
           <a:effectLst/>
@@ -5662,20 +6223,20 @@
       </p:sp>
       <p:sp>
         <p:nvSpPr>
-          <p:cNvPr id="10" name="Oval 9"/>
+          <p:cNvPr id="17" name="Oval 16"/>
           <p:cNvSpPr/>
           <p:nvPr/>
         </p:nvSpPr>
         <p:spPr>
           <a:xfrm>
-            <a:off x="804672" y="2359152"/>
+            <a:off x="6443319" y="2359152"/>
             <a:ext cx="457200" cy="457200"/>
           </a:xfrm>
           <a:prstGeom prst="ellipse">
             <a:avLst/>
           </a:prstGeom>
           <a:solidFill>
-            <a:srgbClr val="2E7D6B"/>
+            <a:srgbClr val="C8A86B"/>
           </a:solidFill>
           <a:ln>
             <a:noFill/>
@@ -5706,13 +6267,13 @@
       </p:sp>
       <p:sp>
         <p:nvSpPr>
-          <p:cNvPr id="11" name="TextBox 10"/>
+          <p:cNvPr id="18" name="TextBox 17"/>
           <p:cNvSpPr txBox="1"/>
           <p:nvPr/>
         </p:nvSpPr>
         <p:spPr>
           <a:xfrm>
-            <a:off x="804672" y="2414016"/>
+            <a:off x="6443319" y="2414016"/>
             <a:ext cx="457200" cy="384048"/>
           </a:xfrm>
           <a:prstGeom prst="rect">
@@ -5736,21 +6297,21 @@
                 <a:ea typeface="微软雅黑"/>
                 <a:cs typeface="微软雅黑"/>
               </a:rPr>
-              <a:t>2</a:t>
-            </a:r>
-          </a:p>
-        </p:txBody>
-      </p:sp>
-      <p:sp>
-        <p:nvSpPr>
-          <p:cNvPr id="12" name="TextBox 11"/>
+              <a:t>3</a:t>
+            </a:r>
+          </a:p>
+        </p:txBody>
+      </p:sp>
+      <p:sp>
+        <p:nvSpPr>
+          <p:cNvPr id="19" name="TextBox 18"/>
           <p:cNvSpPr txBox="1"/>
           <p:nvPr/>
         </p:nvSpPr>
         <p:spPr>
           <a:xfrm>
-            <a:off x="1371600" y="2304288"/>
-            <a:ext cx="9997135" cy="484632"/>
+            <a:off x="7010247" y="2359152"/>
+            <a:ext cx="1539163" cy="457200"/>
           </a:xfrm>
           <a:prstGeom prst="rect">
             <a:avLst/>
@@ -5763,13 +6324,9 @@
           </a:bodyPr>
           <a:lstStyle/>
           <a:p>
-            <a:pPr algn="l">
-              <a:lnSpc>
-                <a:spcPct val="110000"/>
-              </a:lnSpc>
-            </a:pPr>
-            <a:r>
-              <a:rPr sz="1600" b="1">
+            <a:pPr algn="l"/>
+            <a:r>
+              <a:rPr sz="1700" b="1">
                 <a:solidFill>
                   <a:srgbClr val="1C2A33"/>
                 </a:solidFill>
@@ -5777,21 +6334,65 @@
                 <a:ea typeface="微软雅黑"/>
                 <a:cs typeface="微软雅黑"/>
               </a:rPr>
-              <a:t>Step 2 结构</a:t>
-            </a:r>
-          </a:p>
-        </p:txBody>
-      </p:sp>
-      <p:sp>
-        <p:nvSpPr>
-          <p:cNvPr id="13" name="Rounded Rectangle 12"/>
+              <a:t>误用例警示法</a:t>
+            </a:r>
+          </a:p>
+        </p:txBody>
+      </p:sp>
+      <p:sp>
+        <p:nvSpPr>
+          <p:cNvPr id="20" name="TextBox 19"/>
+          <p:cNvSpPr txBox="1"/>
+          <p:nvPr/>
+        </p:nvSpPr>
+        <p:spPr>
+          <a:xfrm>
+            <a:off x="7010247" y="2852928"/>
+            <a:ext cx="1539163" cy="2880360"/>
+          </a:xfrm>
+          <a:prstGeom prst="rect">
+            <a:avLst/>
+          </a:prstGeom>
+          <a:noFill/>
+        </p:spPr>
+        <p:txBody>
+          <a:bodyPr wrap="square" anchor="t" lIns="0" rIns="0" tIns="0" bIns="0">
+            <a:spAutoFit/>
+          </a:bodyPr>
+          <a:lstStyle/>
+          <a:p>
+            <a:pPr algn="l">
+              <a:lnSpc>
+                <a:spcPct val="140000"/>
+              </a:lnSpc>
+              <a:spcAft>
+                <a:spcPts val="400"/>
+              </a:spcAft>
+            </a:pPr>
+            <a:r>
+              <a:rPr sz="1400" b="0">
+                <a:solidFill>
+                  <a:srgbClr val="1C2A33"/>
+                </a:solidFill>
+                <a:latin typeface="楷体"/>
+                <a:ea typeface="楷体"/>
+                <a:cs typeface="楷体"/>
+              </a:rPr>
+              <a:t/>
+            </a:r>
+          </a:p>
+        </p:txBody>
+      </p:sp>
+      <p:sp>
+        <p:nvSpPr>
+          <p:cNvPr id="21" name="Rounded Rectangle 20"/>
           <p:cNvSpPr/>
           <p:nvPr/>
         </p:nvSpPr>
         <p:spPr>
           <a:xfrm>
-            <a:off x="640080" y="3017520"/>
-            <a:ext cx="10911535" cy="685800"/>
+            <a:off x="9098051" y="2194560"/>
+            <a:ext cx="2453563" cy="3657600"/>
           </a:xfrm>
           <a:prstGeom prst="roundRect">
             <a:avLst/>
@@ -5801,7 +6402,7 @@
           </a:solidFill>
           <a:ln w="22860">
             <a:solidFill>
-              <a:srgbClr val="2E7D6B"/>
+              <a:srgbClr val="6B6258"/>
             </a:solidFill>
           </a:ln>
           <a:effectLst/>
@@ -5830,20 +6431,20 @@
       </p:sp>
       <p:sp>
         <p:nvSpPr>
-          <p:cNvPr id="14" name="Oval 13"/>
+          <p:cNvPr id="22" name="Oval 21"/>
           <p:cNvSpPr/>
           <p:nvPr/>
         </p:nvSpPr>
         <p:spPr>
           <a:xfrm>
-            <a:off x="804672" y="3182112"/>
+            <a:off x="9262643" y="2359152"/>
             <a:ext cx="457200" cy="457200"/>
           </a:xfrm>
           <a:prstGeom prst="ellipse">
             <a:avLst/>
           </a:prstGeom>
           <a:solidFill>
-            <a:srgbClr val="2E7D6B"/>
+            <a:srgbClr val="6B6258"/>
           </a:solidFill>
           <a:ln>
             <a:noFill/>
@@ -5874,181 +6475,13 @@
       </p:sp>
       <p:sp>
         <p:nvSpPr>
-          <p:cNvPr id="15" name="TextBox 14"/>
+          <p:cNvPr id="23" name="TextBox 22"/>
           <p:cNvSpPr txBox="1"/>
           <p:nvPr/>
         </p:nvSpPr>
         <p:spPr>
           <a:xfrm>
-            <a:off x="804672" y="3236976"/>
-            <a:ext cx="457200" cy="384048"/>
-          </a:xfrm>
-          <a:prstGeom prst="rect">
-            <a:avLst/>
-          </a:prstGeom>
-          <a:noFill/>
-        </p:spPr>
-        <p:txBody>
-          <a:bodyPr wrap="square" anchor="t" lIns="0" rIns="0" tIns="0" bIns="0">
-            <a:spAutoFit/>
-          </a:bodyPr>
-          <a:lstStyle/>
-          <a:p>
-            <a:pPr algn="ctr"/>
-            <a:r>
-              <a:rPr sz="1600" b="1">
-                <a:solidFill>
-                  <a:srgbClr val="FFFFFF"/>
-                </a:solidFill>
-                <a:latin typeface="微软雅黑"/>
-                <a:ea typeface="微软雅黑"/>
-                <a:cs typeface="微软雅黑"/>
-              </a:rPr>
-              <a:t>3</a:t>
-            </a:r>
-          </a:p>
-        </p:txBody>
-      </p:sp>
-      <p:sp>
-        <p:nvSpPr>
-          <p:cNvPr id="16" name="TextBox 15"/>
-          <p:cNvSpPr txBox="1"/>
-          <p:nvPr/>
-        </p:nvSpPr>
-        <p:spPr>
-          <a:xfrm>
-            <a:off x="1371600" y="3127248"/>
-            <a:ext cx="9997135" cy="484632"/>
-          </a:xfrm>
-          <a:prstGeom prst="rect">
-            <a:avLst/>
-          </a:prstGeom>
-          <a:noFill/>
-        </p:spPr>
-        <p:txBody>
-          <a:bodyPr wrap="square" anchor="t" lIns="0" rIns="0" tIns="0" bIns="0">
-            <a:spAutoFit/>
-          </a:bodyPr>
-          <a:lstStyle/>
-          <a:p>
-            <a:pPr algn="l">
-              <a:lnSpc>
-                <a:spcPct val="110000"/>
-              </a:lnSpc>
-            </a:pPr>
-            <a:r>
-              <a:rPr sz="1600" b="1">
-                <a:solidFill>
-                  <a:srgbClr val="1C2A33"/>
-                </a:solidFill>
-                <a:latin typeface="微软雅黑"/>
-                <a:ea typeface="微软雅黑"/>
-                <a:cs typeface="微软雅黑"/>
-              </a:rPr>
-              <a:t>Step 3 误用三型</a:t>
-            </a:r>
-          </a:p>
-        </p:txBody>
-      </p:sp>
-      <p:sp>
-        <p:nvSpPr>
-          <p:cNvPr id="17" name="Rounded Rectangle 16"/>
-          <p:cNvSpPr/>
-          <p:nvPr/>
-        </p:nvSpPr>
-        <p:spPr>
-          <a:xfrm>
-            <a:off x="640080" y="3840480"/>
-            <a:ext cx="10911535" cy="685800"/>
-          </a:xfrm>
-          <a:prstGeom prst="roundRect">
-            <a:avLst/>
-          </a:prstGeom>
-          <a:solidFill>
-            <a:srgbClr val="FFFFFF"/>
-          </a:solidFill>
-          <a:ln w="22860">
-            <a:solidFill>
-              <a:srgbClr val="2E7D6B"/>
-            </a:solidFill>
-          </a:ln>
-          <a:effectLst/>
-        </p:spPr>
-        <p:style>
-          <a:lnRef idx="1">
-            <a:schemeClr val="accent1"/>
-          </a:lnRef>
-          <a:fillRef idx="3">
-            <a:schemeClr val="accent1"/>
-          </a:fillRef>
-          <a:effectRef idx="2">
-            <a:schemeClr val="accent1"/>
-          </a:effectRef>
-          <a:fontRef idx="minor">
-            <a:schemeClr val="lt1"/>
-          </a:fontRef>
-        </p:style>
-        <p:txBody>
-          <a:bodyPr rtlCol="0" anchor="ctr"/>
-          <a:lstStyle/>
-          <a:p>
-            <a:pPr algn="ctr"/>
-          </a:p>
-        </p:txBody>
-      </p:sp>
-      <p:sp>
-        <p:nvSpPr>
-          <p:cNvPr id="18" name="Oval 17"/>
-          <p:cNvSpPr/>
-          <p:nvPr/>
-        </p:nvSpPr>
-        <p:spPr>
-          <a:xfrm>
-            <a:off x="804672" y="4005072"/>
-            <a:ext cx="457200" cy="457200"/>
-          </a:xfrm>
-          <a:prstGeom prst="ellipse">
-            <a:avLst/>
-          </a:prstGeom>
-          <a:solidFill>
-            <a:srgbClr val="2E7D6B"/>
-          </a:solidFill>
-          <a:ln>
-            <a:noFill/>
-          </a:ln>
-          <a:effectLst/>
-        </p:spPr>
-        <p:style>
-          <a:lnRef idx="1">
-            <a:schemeClr val="accent1"/>
-          </a:lnRef>
-          <a:fillRef idx="3">
-            <a:schemeClr val="accent1"/>
-          </a:fillRef>
-          <a:effectRef idx="2">
-            <a:schemeClr val="accent1"/>
-          </a:effectRef>
-          <a:fontRef idx="minor">
-            <a:schemeClr val="lt1"/>
-          </a:fontRef>
-        </p:style>
-        <p:txBody>
-          <a:bodyPr rtlCol="0" anchor="ctr"/>
-          <a:lstStyle/>
-          <a:p>
-            <a:pPr algn="ctr"/>
-          </a:p>
-        </p:txBody>
-      </p:sp>
-      <p:sp>
-        <p:nvSpPr>
-          <p:cNvPr id="19" name="TextBox 18"/>
-          <p:cNvSpPr txBox="1"/>
-          <p:nvPr/>
-        </p:nvSpPr>
-        <p:spPr>
-          <a:xfrm>
-            <a:off x="804672" y="4059936"/>
+            <a:off x="9262643" y="2414016"/>
             <a:ext cx="457200" cy="384048"/>
           </a:xfrm>
           <a:prstGeom prst="rect">
@@ -6079,14 +6512,14 @@
       </p:sp>
       <p:sp>
         <p:nvSpPr>
-          <p:cNvPr id="20" name="TextBox 19"/>
+          <p:cNvPr id="24" name="TextBox 23"/>
           <p:cNvSpPr txBox="1"/>
           <p:nvPr/>
         </p:nvSpPr>
         <p:spPr>
           <a:xfrm>
-            <a:off x="1371600" y="3950208"/>
-            <a:ext cx="9997135" cy="484632"/>
+            <a:off x="9829571" y="2359152"/>
+            <a:ext cx="1539163" cy="457200"/>
           </a:xfrm>
           <a:prstGeom prst="rect">
             <a:avLst/>
@@ -6099,13 +6532,9 @@
           </a:bodyPr>
           <a:lstStyle/>
           <a:p>
-            <a:pPr algn="l">
-              <a:lnSpc>
-                <a:spcPct val="110000"/>
-              </a:lnSpc>
-            </a:pPr>
-            <a:r>
-              <a:rPr sz="1600" b="1">
+            <a:pPr algn="l"/>
+            <a:r>
+              <a:rPr sz="1700" b="1">
                 <a:solidFill>
                   <a:srgbClr val="1C2A33"/>
                 </a:solidFill>
@@ -6113,111 +6542,21 @@
                 <a:ea typeface="微软雅黑"/>
                 <a:cs typeface="微软雅黑"/>
               </a:rPr>
-              <a:t>Step 4 运用三步</a:t>
-            </a:r>
-          </a:p>
-        </p:txBody>
-      </p:sp>
-      <p:sp>
-        <p:nvSpPr>
-          <p:cNvPr id="21" name="Rounded Rectangle 20"/>
-          <p:cNvSpPr/>
-          <p:nvPr/>
-        </p:nvSpPr>
-        <p:spPr>
-          <a:xfrm>
-            <a:off x="640080" y="4663440"/>
-            <a:ext cx="10911535" cy="685800"/>
-          </a:xfrm>
-          <a:prstGeom prst="roundRect">
-            <a:avLst/>
-          </a:prstGeom>
-          <a:solidFill>
-            <a:srgbClr val="FFFFFF"/>
-          </a:solidFill>
-          <a:ln w="22860">
-            <a:solidFill>
-              <a:srgbClr val="2E7D6B"/>
-            </a:solidFill>
-          </a:ln>
-          <a:effectLst/>
-        </p:spPr>
-        <p:style>
-          <a:lnRef idx="1">
-            <a:schemeClr val="accent1"/>
-          </a:lnRef>
-          <a:fillRef idx="3">
-            <a:schemeClr val="accent1"/>
-          </a:fillRef>
-          <a:effectRef idx="2">
-            <a:schemeClr val="accent1"/>
-          </a:effectRef>
-          <a:fontRef idx="minor">
-            <a:schemeClr val="lt1"/>
-          </a:fontRef>
-        </p:style>
-        <p:txBody>
-          <a:bodyPr rtlCol="0" anchor="ctr"/>
-          <a:lstStyle/>
-          <a:p>
-            <a:pPr algn="ctr"/>
-          </a:p>
-        </p:txBody>
-      </p:sp>
-      <p:sp>
-        <p:nvSpPr>
-          <p:cNvPr id="22" name="Oval 21"/>
-          <p:cNvSpPr/>
-          <p:nvPr/>
-        </p:nvSpPr>
-        <p:spPr>
-          <a:xfrm>
-            <a:off x="804672" y="4828032"/>
-            <a:ext cx="457200" cy="457200"/>
-          </a:xfrm>
-          <a:prstGeom prst="ellipse">
-            <a:avLst/>
-          </a:prstGeom>
-          <a:solidFill>
-            <a:srgbClr val="2E7D6B"/>
-          </a:solidFill>
-          <a:ln>
-            <a:noFill/>
-          </a:ln>
-          <a:effectLst/>
-        </p:spPr>
-        <p:style>
-          <a:lnRef idx="1">
-            <a:schemeClr val="accent1"/>
-          </a:lnRef>
-          <a:fillRef idx="3">
-            <a:schemeClr val="accent1"/>
-          </a:fillRef>
-          <a:effectRef idx="2">
-            <a:schemeClr val="accent1"/>
-          </a:effectRef>
-          <a:fontRef idx="minor">
-            <a:schemeClr val="lt1"/>
-          </a:fontRef>
-        </p:style>
-        <p:txBody>
-          <a:bodyPr rtlCol="0" anchor="ctr"/>
-          <a:lstStyle/>
-          <a:p>
-            <a:pPr algn="ctr"/>
-          </a:p>
-        </p:txBody>
-      </p:sp>
-      <p:sp>
-        <p:nvSpPr>
-          <p:cNvPr id="23" name="TextBox 22"/>
+              <a:t>语境运用法</a:t>
+            </a:r>
+          </a:p>
+        </p:txBody>
+      </p:sp>
+      <p:sp>
+        <p:nvSpPr>
+          <p:cNvPr id="25" name="TextBox 24"/>
           <p:cNvSpPr txBox="1"/>
           <p:nvPr/>
         </p:nvSpPr>
         <p:spPr>
           <a:xfrm>
-            <a:off x="804672" y="4882896"/>
-            <a:ext cx="457200" cy="384048"/>
+            <a:off x="9829571" y="2852928"/>
+            <a:ext cx="1539163" cy="2880360"/>
           </a:xfrm>
           <a:prstGeom prst="rect">
             <a:avLst/>
@@ -6230,233 +6569,31 @@
           </a:bodyPr>
           <a:lstStyle/>
           <a:p>
-            <a:pPr algn="ctr"/>
-            <a:r>
-              <a:rPr sz="1600" b="1">
-                <a:solidFill>
-                  <a:srgbClr val="FFFFFF"/>
-                </a:solidFill>
-                <a:latin typeface="微软雅黑"/>
-                <a:ea typeface="微软雅黑"/>
-                <a:cs typeface="微软雅黑"/>
-              </a:rPr>
-              <a:t>5</a:t>
-            </a:r>
-          </a:p>
-        </p:txBody>
-      </p:sp>
-      <p:sp>
-        <p:nvSpPr>
-          <p:cNvPr id="24" name="TextBox 23"/>
-          <p:cNvSpPr txBox="1"/>
-          <p:nvPr/>
-        </p:nvSpPr>
-        <p:spPr>
-          <a:xfrm>
-            <a:off x="1371600" y="4773168"/>
-            <a:ext cx="9997135" cy="484632"/>
-          </a:xfrm>
-          <a:prstGeom prst="rect">
-            <a:avLst/>
-          </a:prstGeom>
-          <a:noFill/>
-        </p:spPr>
-        <p:txBody>
-          <a:bodyPr wrap="square" anchor="t" lIns="0" rIns="0" tIns="0" bIns="0">
-            <a:spAutoFit/>
-          </a:bodyPr>
-          <a:lstStyle/>
-          <a:p>
             <a:pPr algn="l">
               <a:lnSpc>
-                <a:spcPct val="110000"/>
+                <a:spcPct val="140000"/>
               </a:lnSpc>
+              <a:spcAft>
+                <a:spcPts val="400"/>
+              </a:spcAft>
             </a:pPr>
             <a:r>
-              <a:rPr sz="1600" b="1">
+              <a:rPr sz="1400" b="0">
                 <a:solidFill>
                   <a:srgbClr val="1C2A33"/>
                 </a:solidFill>
-                <a:latin typeface="微软雅黑"/>
-                <a:ea typeface="微软雅黑"/>
-                <a:cs typeface="微软雅黑"/>
+                <a:latin typeface="楷体"/>
+                <a:ea typeface="楷体"/>
+                <a:cs typeface="楷体"/>
               </a:rPr>
-              <a:t>Step 5 练习</a:t>
-            </a:r>
-          </a:p>
-        </p:txBody>
-      </p:sp>
-      <p:sp>
-        <p:nvSpPr>
-          <p:cNvPr id="25" name="Rounded Rectangle 24"/>
-          <p:cNvSpPr/>
-          <p:nvPr/>
-        </p:nvSpPr>
-        <p:spPr>
-          <a:xfrm>
-            <a:off x="640080" y="5486400"/>
-            <a:ext cx="10911535" cy="685800"/>
-          </a:xfrm>
-          <a:prstGeom prst="roundRect">
-            <a:avLst/>
-          </a:prstGeom>
-          <a:solidFill>
-            <a:srgbClr val="FFFFFF"/>
-          </a:solidFill>
-          <a:ln w="22860">
-            <a:solidFill>
-              <a:srgbClr val="2E7D6B"/>
-            </a:solidFill>
-          </a:ln>
-          <a:effectLst/>
-        </p:spPr>
-        <p:style>
-          <a:lnRef idx="1">
-            <a:schemeClr val="accent1"/>
-          </a:lnRef>
-          <a:fillRef idx="3">
-            <a:schemeClr val="accent1"/>
-          </a:fillRef>
-          <a:effectRef idx="2">
-            <a:schemeClr val="accent1"/>
-          </a:effectRef>
-          <a:fontRef idx="minor">
-            <a:schemeClr val="lt1"/>
-          </a:fontRef>
-        </p:style>
-        <p:txBody>
-          <a:bodyPr rtlCol="0" anchor="ctr"/>
-          <a:lstStyle/>
-          <a:p>
-            <a:pPr algn="ctr"/>
-          </a:p>
-        </p:txBody>
-      </p:sp>
-      <p:sp>
-        <p:nvSpPr>
-          <p:cNvPr id="26" name="Oval 25"/>
-          <p:cNvSpPr/>
-          <p:nvPr/>
-        </p:nvSpPr>
-        <p:spPr>
-          <a:xfrm>
-            <a:off x="804672" y="5650992"/>
-            <a:ext cx="457200" cy="457200"/>
-          </a:xfrm>
-          <a:prstGeom prst="ellipse">
-            <a:avLst/>
-          </a:prstGeom>
-          <a:solidFill>
-            <a:srgbClr val="2E7D6B"/>
-          </a:solidFill>
-          <a:ln>
-            <a:noFill/>
-          </a:ln>
-          <a:effectLst/>
-        </p:spPr>
-        <p:style>
-          <a:lnRef idx="1">
-            <a:schemeClr val="accent1"/>
-          </a:lnRef>
-          <a:fillRef idx="3">
-            <a:schemeClr val="accent1"/>
-          </a:fillRef>
-          <a:effectRef idx="2">
-            <a:schemeClr val="accent1"/>
-          </a:effectRef>
-          <a:fontRef idx="minor">
-            <a:schemeClr val="lt1"/>
-          </a:fontRef>
-        </p:style>
-        <p:txBody>
-          <a:bodyPr rtlCol="0" anchor="ctr"/>
-          <a:lstStyle/>
-          <a:p>
-            <a:pPr algn="ctr"/>
-          </a:p>
-        </p:txBody>
-      </p:sp>
-      <p:sp>
-        <p:nvSpPr>
-          <p:cNvPr id="27" name="TextBox 26"/>
-          <p:cNvSpPr txBox="1"/>
-          <p:nvPr/>
-        </p:nvSpPr>
-        <p:spPr>
-          <a:xfrm>
-            <a:off x="804672" y="5705856"/>
-            <a:ext cx="457200" cy="384048"/>
-          </a:xfrm>
-          <a:prstGeom prst="rect">
-            <a:avLst/>
-          </a:prstGeom>
-          <a:noFill/>
-        </p:spPr>
-        <p:txBody>
-          <a:bodyPr wrap="square" anchor="t" lIns="0" rIns="0" tIns="0" bIns="0">
-            <a:spAutoFit/>
-          </a:bodyPr>
-          <a:lstStyle/>
-          <a:p>
-            <a:pPr algn="ctr"/>
-            <a:r>
-              <a:rPr sz="1600" b="1">
-                <a:solidFill>
-                  <a:srgbClr val="FFFFFF"/>
-                </a:solidFill>
-                <a:latin typeface="微软雅黑"/>
-                <a:ea typeface="微软雅黑"/>
-                <a:cs typeface="微软雅黑"/>
-              </a:rPr>
-              <a:t>6</a:t>
-            </a:r>
-          </a:p>
-        </p:txBody>
-      </p:sp>
-      <p:sp>
-        <p:nvSpPr>
-          <p:cNvPr id="28" name="TextBox 27"/>
-          <p:cNvSpPr txBox="1"/>
-          <p:nvPr/>
-        </p:nvSpPr>
-        <p:spPr>
-          <a:xfrm>
-            <a:off x="1371600" y="5596128"/>
-            <a:ext cx="9997135" cy="484632"/>
-          </a:xfrm>
-          <a:prstGeom prst="rect">
-            <a:avLst/>
-          </a:prstGeom>
-          <a:noFill/>
-        </p:spPr>
-        <p:txBody>
-          <a:bodyPr wrap="square" anchor="t" lIns="0" rIns="0" tIns="0" bIns="0">
-            <a:spAutoFit/>
-          </a:bodyPr>
-          <a:lstStyle/>
-          <a:p>
-            <a:pPr algn="l">
-              <a:lnSpc>
-                <a:spcPct val="110000"/>
-              </a:lnSpc>
-            </a:pPr>
-            <a:r>
-              <a:rPr sz="1600" b="1">
-                <a:solidFill>
-                  <a:srgbClr val="1C2A33"/>
-                </a:solidFill>
-                <a:latin typeface="微软雅黑"/>
-                <a:ea typeface="微软雅黑"/>
-                <a:cs typeface="微软雅黑"/>
-              </a:rPr>
-              <a:t>Step 6 小结+作业</a:t>
-            </a:r>
-          </a:p>
-        </p:txBody>
-      </p:sp>
-      <p:sp>
-        <p:nvSpPr>
-          <p:cNvPr id="29" name="TextBox 28"/>
+              <a:t/>
+            </a:r>
+          </a:p>
+        </p:txBody>
+      </p:sp>
+      <p:sp>
+        <p:nvSpPr>
+          <p:cNvPr id="26" name="TextBox 25"/>
           <p:cNvSpPr txBox="1"/>
           <p:nvPr/>
         </p:nvSpPr>
@@ -6589,7 +6726,7 @@
                 <a:ea typeface="微软雅黑"/>
                 <a:cs typeface="微软雅黑"/>
               </a:rPr>
-              <a:t>易混易错</a:t>
+              <a:t>难点</a:t>
             </a:r>
           </a:p>
         </p:txBody>
@@ -6640,14 +6777,51 @@
       </p:sp>
       <p:sp>
         <p:nvSpPr>
-          <p:cNvPr id="5" name="Rounded Rectangle 4"/>
+          <p:cNvPr id="5" name="TextBox 4"/>
+          <p:cNvSpPr txBox="1"/>
+          <p:nvPr/>
+        </p:nvSpPr>
+        <p:spPr>
+          <a:xfrm>
+            <a:off x="640080" y="1325880"/>
+            <a:ext cx="10058400" cy="640080"/>
+          </a:xfrm>
+          <a:prstGeom prst="rect">
+            <a:avLst/>
+          </a:prstGeom>
+          <a:noFill/>
+        </p:spPr>
+        <p:txBody>
+          <a:bodyPr wrap="square" anchor="t" lIns="0" rIns="0" tIns="0" bIns="0">
+            <a:spAutoFit/>
+          </a:bodyPr>
+          <a:lstStyle/>
+          <a:p>
+            <a:pPr algn="l"/>
+            <a:r>
+              <a:rPr sz="3000" b="1">
+                <a:solidFill>
+                  <a:srgbClr val="1C2A33"/>
+                </a:solidFill>
+                <a:latin typeface="楷体"/>
+                <a:ea typeface="楷体"/>
+                <a:cs typeface="楷体"/>
+              </a:rPr>
+              <a:t>本课难点</a:t>
+            </a:r>
+          </a:p>
+        </p:txBody>
+      </p:sp>
+      <p:sp>
+        <p:nvSpPr>
+          <p:cNvPr id="6" name="Rounded Rectangle 5"/>
           <p:cNvSpPr/>
           <p:nvPr/>
         </p:nvSpPr>
         <p:spPr>
           <a:xfrm>
-            <a:off x="640080" y="1417320"/>
-            <a:ext cx="5349240" cy="2057400"/>
+            <a:off x="640080" y="2194560"/>
+            <a:ext cx="3393338" cy="3931920"/>
           </a:xfrm>
           <a:prstGeom prst="roundRect">
             <a:avLst/>
@@ -6655,7 +6829,7 @@
           <a:solidFill>
             <a:srgbClr val="FFFFFF"/>
           </a:solidFill>
-          <a:ln w="22860">
+          <a:ln w="20320">
             <a:solidFill>
               <a:srgbClr val="B23A2A"/>
             </a:solidFill>
@@ -6686,16 +6860,16 @@
       </p:sp>
       <p:sp>
         <p:nvSpPr>
-          <p:cNvPr id="6" name="Oval 5"/>
+          <p:cNvPr id="7" name="Rectangle 6"/>
           <p:cNvSpPr/>
           <p:nvPr/>
         </p:nvSpPr>
         <p:spPr>
           <a:xfrm>
-            <a:off x="804672" y="1581912"/>
-            <a:ext cx="457200" cy="457200"/>
-          </a:xfrm>
-          <a:prstGeom prst="ellipse">
+            <a:off x="640080" y="2194560"/>
+            <a:ext cx="3393338" cy="548640"/>
+          </a:xfrm>
+          <a:prstGeom prst="rect">
             <a:avLst/>
           </a:prstGeom>
           <a:solidFill>
@@ -6730,14 +6904,14 @@
       </p:sp>
       <p:sp>
         <p:nvSpPr>
-          <p:cNvPr id="7" name="TextBox 6"/>
+          <p:cNvPr id="8" name="TextBox 7"/>
           <p:cNvSpPr txBox="1"/>
           <p:nvPr/>
         </p:nvSpPr>
         <p:spPr>
           <a:xfrm>
-            <a:off x="804672" y="1636776"/>
-            <a:ext cx="457200" cy="384048"/>
+            <a:off x="640080" y="2304288"/>
+            <a:ext cx="3393338" cy="365760"/>
           </a:xfrm>
           <a:prstGeom prst="rect">
             <a:avLst/>
@@ -6752,7 +6926,7 @@
           <a:p>
             <a:pPr algn="ctr"/>
             <a:r>
-              <a:rPr sz="1600" b="1">
+              <a:rPr sz="1500" b="1">
                 <a:solidFill>
                   <a:srgbClr val="FFFFFF"/>
                 </a:solidFill>
@@ -6760,21 +6934,21 @@
                 <a:ea typeface="微软雅黑"/>
                 <a:cs typeface="微软雅黑"/>
               </a:rPr>
-              <a:t>!</a:t>
-            </a:r>
-          </a:p>
-        </p:txBody>
-      </p:sp>
-      <p:sp>
-        <p:nvSpPr>
-          <p:cNvPr id="8" name="TextBox 7"/>
+              <a:t>难点 1</a:t>
+            </a:r>
+          </a:p>
+        </p:txBody>
+      </p:sp>
+      <p:sp>
+        <p:nvSpPr>
+          <p:cNvPr id="9" name="TextBox 8"/>
           <p:cNvSpPr txBox="1"/>
           <p:nvPr/>
         </p:nvSpPr>
         <p:spPr>
           <a:xfrm>
-            <a:off x="1371600" y="1527048"/>
-            <a:ext cx="4434840" cy="457200"/>
+            <a:off x="914400" y="2971800"/>
+            <a:ext cx="2844698" cy="3017520"/>
           </a:xfrm>
           <a:prstGeom prst="rect">
             <a:avLst/>
@@ -6789,52 +6963,14 @@
           <a:p>
             <a:pPr algn="l">
               <a:lnSpc>
-                <a:spcPct val="110000"/>
+                <a:spcPct val="145000"/>
               </a:lnSpc>
+              <a:spcAft>
+                <a:spcPts val="600"/>
+              </a:spcAft>
             </a:pPr>
             <a:r>
-              <a:rPr sz="1600" b="1">
-                <a:solidFill>
-                  <a:srgbClr val="1C2A33"/>
-                </a:solidFill>
-                <a:latin typeface="微软雅黑"/>
-                <a:ea typeface="微软雅黑"/>
-                <a:cs typeface="微软雅黑"/>
-              </a:rPr>
-              <a:t/>
-            </a:r>
-          </a:p>
-        </p:txBody>
-      </p:sp>
-      <p:sp>
-        <p:nvSpPr>
-          <p:cNvPr id="9" name="TextBox 8"/>
-          <p:cNvSpPr txBox="1"/>
-          <p:nvPr/>
-        </p:nvSpPr>
-        <p:spPr>
-          <a:xfrm>
-            <a:off x="1371600" y="1965960"/>
-            <a:ext cx="4434840" cy="1417320"/>
-          </a:xfrm>
-          <a:prstGeom prst="rect">
-            <a:avLst/>
-          </a:prstGeom>
-          <a:noFill/>
-        </p:spPr>
-        <p:txBody>
-          <a:bodyPr wrap="square" anchor="t" lIns="0" rIns="0" tIns="0" bIns="0">
-            <a:spAutoFit/>
-          </a:bodyPr>
-          <a:lstStyle/>
-          <a:p>
-            <a:pPr algn="l">
-              <a:lnSpc>
-                <a:spcPct val="128000"/>
-              </a:lnSpc>
-            </a:pPr>
-            <a:r>
-              <a:rPr sz="1400" b="0">
+              <a:rPr sz="1500" b="1">
                 <a:solidFill>
                   <a:srgbClr val="1C2A33"/>
                 </a:solidFill>
@@ -6842,7 +6978,25 @@
                 <a:ea typeface="楷体"/>
                 <a:cs typeface="楷体"/>
               </a:rPr>
-              <a:t>① 来源归类。原因：学生不知出处，需举例。</a:t>
+              <a:t>来源归类</a:t>
+            </a:r>
+          </a:p>
+          <a:p>
+            <a:pPr algn="l">
+              <a:lnSpc>
+                <a:spcPct val="150000"/>
+              </a:lnSpc>
+            </a:pPr>
+            <a:r>
+              <a:rPr sz="1300" b="0">
+                <a:solidFill>
+                  <a:srgbClr val="B23A2A"/>
+                </a:solidFill>
+                <a:latin typeface="楷体"/>
+                <a:ea typeface="楷体"/>
+                <a:cs typeface="楷体"/>
+              </a:rPr>
+              <a:t>破解：学生不知出处，需举例。</a:t>
             </a:r>
           </a:p>
         </p:txBody>
@@ -6855,8 +7009,8 @@
         </p:nvSpPr>
         <p:spPr>
           <a:xfrm>
-            <a:off x="6263640" y="1417320"/>
-            <a:ext cx="5349240" cy="2057400"/>
+            <a:off x="4399178" y="2194560"/>
+            <a:ext cx="3393338" cy="3931920"/>
           </a:xfrm>
           <a:prstGeom prst="roundRect">
             <a:avLst/>
@@ -6864,9 +7018,9 @@
           <a:solidFill>
             <a:srgbClr val="FFFFFF"/>
           </a:solidFill>
-          <a:ln w="22860">
+          <a:ln w="20320">
             <a:solidFill>
-              <a:srgbClr val="B23A2A"/>
+              <a:srgbClr val="2E7D6B"/>
             </a:solidFill>
           </a:ln>
           <a:effectLst/>
@@ -6895,20 +7049,20 @@
       </p:sp>
       <p:sp>
         <p:nvSpPr>
-          <p:cNvPr id="11" name="Oval 10"/>
+          <p:cNvPr id="11" name="Rectangle 10"/>
           <p:cNvSpPr/>
           <p:nvPr/>
         </p:nvSpPr>
         <p:spPr>
           <a:xfrm>
-            <a:off x="6428232" y="1581912"/>
-            <a:ext cx="457200" cy="457200"/>
-          </a:xfrm>
-          <a:prstGeom prst="ellipse">
+            <a:off x="4399178" y="2194560"/>
+            <a:ext cx="3393338" cy="548640"/>
+          </a:xfrm>
+          <a:prstGeom prst="rect">
             <a:avLst/>
           </a:prstGeom>
           <a:solidFill>
-            <a:srgbClr val="B23A2A"/>
+            <a:srgbClr val="2E7D6B"/>
           </a:solidFill>
           <a:ln>
             <a:noFill/>
@@ -6945,8 +7099,8 @@
         </p:nvSpPr>
         <p:spPr>
           <a:xfrm>
-            <a:off x="6428232" y="1636776"/>
-            <a:ext cx="457200" cy="384048"/>
+            <a:off x="4399178" y="2304288"/>
+            <a:ext cx="3393338" cy="365760"/>
           </a:xfrm>
           <a:prstGeom prst="rect">
             <a:avLst/>
@@ -6961,7 +7115,7 @@
           <a:p>
             <a:pPr algn="ctr"/>
             <a:r>
-              <a:rPr sz="1600" b="1">
+              <a:rPr sz="1500" b="1">
                 <a:solidFill>
                   <a:srgbClr val="FFFFFF"/>
                 </a:solidFill>
@@ -6969,7 +7123,7 @@
                 <a:ea typeface="微软雅黑"/>
                 <a:cs typeface="微软雅黑"/>
               </a:rPr>
-              <a:t>!</a:t>
+              <a:t>难点 2</a:t>
             </a:r>
           </a:p>
         </p:txBody>
@@ -6982,8 +7136,8 @@
         </p:nvSpPr>
         <p:spPr>
           <a:xfrm>
-            <a:off x="6995160" y="1527048"/>
-            <a:ext cx="4434840" cy="457200"/>
+            <a:off x="4673498" y="2971800"/>
+            <a:ext cx="2844698" cy="3017520"/>
           </a:xfrm>
           <a:prstGeom prst="rect">
             <a:avLst/>
@@ -6998,52 +7152,14 @@
           <a:p>
             <a:pPr algn="l">
               <a:lnSpc>
-                <a:spcPct val="110000"/>
+                <a:spcPct val="145000"/>
               </a:lnSpc>
+              <a:spcAft>
+                <a:spcPts val="600"/>
+              </a:spcAft>
             </a:pPr>
             <a:r>
-              <a:rPr sz="1600" b="1">
-                <a:solidFill>
-                  <a:srgbClr val="1C2A33"/>
-                </a:solidFill>
-                <a:latin typeface="微软雅黑"/>
-                <a:ea typeface="微软雅黑"/>
-                <a:cs typeface="微软雅黑"/>
-              </a:rPr>
-              <a:t/>
-            </a:r>
-          </a:p>
-        </p:txBody>
-      </p:sp>
-      <p:sp>
-        <p:nvSpPr>
-          <p:cNvPr id="14" name="TextBox 13"/>
-          <p:cNvSpPr txBox="1"/>
-          <p:nvPr/>
-        </p:nvSpPr>
-        <p:spPr>
-          <a:xfrm>
-            <a:off x="6995160" y="1965960"/>
-            <a:ext cx="4434840" cy="1417320"/>
-          </a:xfrm>
-          <a:prstGeom prst="rect">
-            <a:avLst/>
-          </a:prstGeom>
-          <a:noFill/>
-        </p:spPr>
-        <p:txBody>
-          <a:bodyPr wrap="square" anchor="t" lIns="0" rIns="0" tIns="0" bIns="0">
-            <a:spAutoFit/>
-          </a:bodyPr>
-          <a:lstStyle/>
-          <a:p>
-            <a:pPr algn="l">
-              <a:lnSpc>
-                <a:spcPct val="128000"/>
-              </a:lnSpc>
-            </a:pPr>
-            <a:r>
-              <a:rPr sz="1400" b="0">
+              <a:rPr sz="1500" b="1">
                 <a:solidFill>
                   <a:srgbClr val="1C2A33"/>
                 </a:solidFill>
@@ -7051,21 +7167,39 @@
                 <a:ea typeface="楷体"/>
                 <a:cs typeface="楷体"/>
               </a:rPr>
-              <a:t>② 对象误用。原因：如汗牛充栋限书，需强警示。</a:t>
-            </a:r>
-          </a:p>
-        </p:txBody>
-      </p:sp>
-      <p:sp>
-        <p:nvSpPr>
-          <p:cNvPr id="15" name="Rounded Rectangle 14"/>
+              <a:t>对象误用</a:t>
+            </a:r>
+          </a:p>
+          <a:p>
+            <a:pPr algn="l">
+              <a:lnSpc>
+                <a:spcPct val="150000"/>
+              </a:lnSpc>
+            </a:pPr>
+            <a:r>
+              <a:rPr sz="1300" b="0">
+                <a:solidFill>
+                  <a:srgbClr val="2E7D6B"/>
+                </a:solidFill>
+                <a:latin typeface="楷体"/>
+                <a:ea typeface="楷体"/>
+                <a:cs typeface="楷体"/>
+              </a:rPr>
+              <a:t>破解：如汗牛充栋限书，需强警示。</a:t>
+            </a:r>
+          </a:p>
+        </p:txBody>
+      </p:sp>
+      <p:sp>
+        <p:nvSpPr>
+          <p:cNvPr id="14" name="Rounded Rectangle 13"/>
           <p:cNvSpPr/>
           <p:nvPr/>
         </p:nvSpPr>
         <p:spPr>
           <a:xfrm>
-            <a:off x="640080" y="3703320"/>
-            <a:ext cx="5349240" cy="2057400"/>
+            <a:off x="8158276" y="2194560"/>
+            <a:ext cx="3393338" cy="3931920"/>
           </a:xfrm>
           <a:prstGeom prst="roundRect">
             <a:avLst/>
@@ -7073,9 +7207,9 @@
           <a:solidFill>
             <a:srgbClr val="FFFFFF"/>
           </a:solidFill>
-          <a:ln w="22860">
+          <a:ln w="20320">
             <a:solidFill>
-              <a:srgbClr val="B23A2A"/>
+              <a:srgbClr val="C8A86B"/>
             </a:solidFill>
           </a:ln>
           <a:effectLst/>
@@ -7104,20 +7238,20 @@
       </p:sp>
       <p:sp>
         <p:nvSpPr>
-          <p:cNvPr id="16" name="Oval 15"/>
+          <p:cNvPr id="15" name="Rectangle 14"/>
           <p:cNvSpPr/>
           <p:nvPr/>
         </p:nvSpPr>
         <p:spPr>
           <a:xfrm>
-            <a:off x="804672" y="3867912"/>
-            <a:ext cx="457200" cy="457200"/>
-          </a:xfrm>
-          <a:prstGeom prst="ellipse">
+            <a:off x="8158276" y="2194560"/>
+            <a:ext cx="3393338" cy="548640"/>
+          </a:xfrm>
+          <a:prstGeom prst="rect">
             <a:avLst/>
           </a:prstGeom>
           <a:solidFill>
-            <a:srgbClr val="B23A2A"/>
+            <a:srgbClr val="C8A86B"/>
           </a:solidFill>
           <a:ln>
             <a:noFill/>
@@ -7148,14 +7282,14 @@
       </p:sp>
       <p:sp>
         <p:nvSpPr>
-          <p:cNvPr id="17" name="TextBox 16"/>
+          <p:cNvPr id="16" name="TextBox 15"/>
           <p:cNvSpPr txBox="1"/>
           <p:nvPr/>
         </p:nvSpPr>
         <p:spPr>
           <a:xfrm>
-            <a:off x="804672" y="3922776"/>
-            <a:ext cx="457200" cy="384048"/>
+            <a:off x="8158276" y="2304288"/>
+            <a:ext cx="3393338" cy="365760"/>
           </a:xfrm>
           <a:prstGeom prst="rect">
             <a:avLst/>
@@ -7170,7 +7304,7 @@
           <a:p>
             <a:pPr algn="ctr"/>
             <a:r>
-              <a:rPr sz="1600" b="1">
+              <a:rPr sz="1500" b="1">
                 <a:solidFill>
                   <a:srgbClr val="FFFFFF"/>
                 </a:solidFill>
@@ -7178,21 +7312,21 @@
                 <a:ea typeface="微软雅黑"/>
                 <a:cs typeface="微软雅黑"/>
               </a:rPr>
-              <a:t>!</a:t>
-            </a:r>
-          </a:p>
-        </p:txBody>
-      </p:sp>
-      <p:sp>
-        <p:nvSpPr>
-          <p:cNvPr id="18" name="TextBox 17"/>
+              <a:t>难点 3</a:t>
+            </a:r>
+          </a:p>
+        </p:txBody>
+      </p:sp>
+      <p:sp>
+        <p:nvSpPr>
+          <p:cNvPr id="17" name="TextBox 16"/>
           <p:cNvSpPr txBox="1"/>
           <p:nvPr/>
         </p:nvSpPr>
         <p:spPr>
           <a:xfrm>
-            <a:off x="1371600" y="3813048"/>
-            <a:ext cx="4434840" cy="457200"/>
+            <a:off x="8432596" y="2971800"/>
+            <a:ext cx="2844698" cy="3017520"/>
           </a:xfrm>
           <a:prstGeom prst="rect">
             <a:avLst/>
@@ -7207,52 +7341,14 @@
           <a:p>
             <a:pPr algn="l">
               <a:lnSpc>
-                <a:spcPct val="110000"/>
+                <a:spcPct val="145000"/>
               </a:lnSpc>
+              <a:spcAft>
+                <a:spcPts val="600"/>
+              </a:spcAft>
             </a:pPr>
             <a:r>
-              <a:rPr sz="1600" b="1">
-                <a:solidFill>
-                  <a:srgbClr val="1C2A33"/>
-                </a:solidFill>
-                <a:latin typeface="微软雅黑"/>
-                <a:ea typeface="微软雅黑"/>
-                <a:cs typeface="微软雅黑"/>
-              </a:rPr>
-              <a:t/>
-            </a:r>
-          </a:p>
-        </p:txBody>
-      </p:sp>
-      <p:sp>
-        <p:nvSpPr>
-          <p:cNvPr id="19" name="TextBox 18"/>
-          <p:cNvSpPr txBox="1"/>
-          <p:nvPr/>
-        </p:nvSpPr>
-        <p:spPr>
-          <a:xfrm>
-            <a:off x="1371600" y="4251960"/>
-            <a:ext cx="4434840" cy="1417320"/>
-          </a:xfrm>
-          <a:prstGeom prst="rect">
-            <a:avLst/>
-          </a:prstGeom>
-          <a:noFill/>
-        </p:spPr>
-        <p:txBody>
-          <a:bodyPr wrap="square" anchor="t" lIns="0" rIns="0" tIns="0" bIns="0">
-            <a:spAutoFit/>
-          </a:bodyPr>
-          <a:lstStyle/>
-          <a:p>
-            <a:pPr algn="l">
-              <a:lnSpc>
-                <a:spcPct val="128000"/>
-              </a:lnSpc>
-            </a:pPr>
-            <a:r>
-              <a:rPr sz="1400" b="0">
+              <a:rPr sz="1500" b="1">
                 <a:solidFill>
                   <a:srgbClr val="1C2A33"/>
                 </a:solidFill>
@@ -7260,14 +7356,32 @@
                 <a:ea typeface="楷体"/>
                 <a:cs typeface="楷体"/>
               </a:rPr>
-              <a:t>③ 色彩。原因：褒贬混，需点明。</a:t>
-            </a:r>
-          </a:p>
-        </p:txBody>
-      </p:sp>
-      <p:sp>
-        <p:nvSpPr>
-          <p:cNvPr id="20" name="TextBox 19"/>
+              <a:t>色彩</a:t>
+            </a:r>
+          </a:p>
+          <a:p>
+            <a:pPr algn="l">
+              <a:lnSpc>
+                <a:spcPct val="150000"/>
+              </a:lnSpc>
+            </a:pPr>
+            <a:r>
+              <a:rPr sz="1300" b="0">
+                <a:solidFill>
+                  <a:srgbClr val="C8A86B"/>
+                </a:solidFill>
+                <a:latin typeface="楷体"/>
+                <a:ea typeface="楷体"/>
+                <a:cs typeface="楷体"/>
+              </a:rPr>
+              <a:t>破解：褒贬混，需点明。</a:t>
+            </a:r>
+          </a:p>
+        </p:txBody>
+      </p:sp>
+      <p:sp>
+        <p:nvSpPr>
+          <p:cNvPr id="18" name="TextBox 17"/>
           <p:cNvSpPr txBox="1"/>
           <p:nvPr/>
         </p:nvSpPr>
@@ -7394,13 +7508,13 @@
             <a:r>
               <a:rPr sz="1300" b="1">
                 <a:solidFill>
-                  <a:srgbClr val="C8A86B"/>
+                  <a:srgbClr val="B23A2A"/>
                 </a:solidFill>
                 <a:latin typeface="微软雅黑"/>
                 <a:ea typeface="微软雅黑"/>
                 <a:cs typeface="微软雅黑"/>
               </a:rPr>
-              <a:t>要点板书</a:t>
+              <a:t>板书精华</a:t>
             </a:r>
           </a:p>
         </p:txBody>
@@ -7415,6 +7529,133 @@
           <a:xfrm>
             <a:off x="640080" y="1097280"/>
             <a:ext cx="822960" cy="30480"/>
+          </a:xfrm>
+          <a:prstGeom prst="rect">
+            <a:avLst/>
+          </a:prstGeom>
+          <a:solidFill>
+            <a:srgbClr val="B23A2A"/>
+          </a:solidFill>
+          <a:ln>
+            <a:noFill/>
+          </a:ln>
+          <a:effectLst/>
+        </p:spPr>
+        <p:style>
+          <a:lnRef idx="1">
+            <a:schemeClr val="accent1"/>
+          </a:lnRef>
+          <a:fillRef idx="3">
+            <a:schemeClr val="accent1"/>
+          </a:fillRef>
+          <a:effectRef idx="2">
+            <a:schemeClr val="accent1"/>
+          </a:effectRef>
+          <a:fontRef idx="minor">
+            <a:schemeClr val="lt1"/>
+          </a:fontRef>
+        </p:style>
+        <p:txBody>
+          <a:bodyPr rtlCol="0" anchor="ctr"/>
+          <a:lstStyle/>
+          <a:p>
+            <a:pPr algn="ctr"/>
+          </a:p>
+        </p:txBody>
+      </p:sp>
+      <p:sp>
+        <p:nvSpPr>
+          <p:cNvPr id="5" name="TextBox 4"/>
+          <p:cNvSpPr txBox="1"/>
+          <p:nvPr/>
+        </p:nvSpPr>
+        <p:spPr>
+          <a:xfrm>
+            <a:off x="640080" y="1325880"/>
+            <a:ext cx="10058400" cy="640080"/>
+          </a:xfrm>
+          <a:prstGeom prst="rect">
+            <a:avLst/>
+          </a:prstGeom>
+          <a:noFill/>
+        </p:spPr>
+        <p:txBody>
+          <a:bodyPr wrap="square" anchor="t" lIns="0" rIns="0" tIns="0" bIns="0">
+            <a:spAutoFit/>
+          </a:bodyPr>
+          <a:lstStyle/>
+          <a:p>
+            <a:pPr algn="l"/>
+            <a:r>
+              <a:rPr sz="3000" b="1">
+                <a:solidFill>
+                  <a:srgbClr val="1C2A33"/>
+                </a:solidFill>
+                <a:latin typeface="楷体"/>
+                <a:ea typeface="楷体"/>
+                <a:cs typeface="楷体"/>
+              </a:rPr>
+              <a:t>板书精华</a:t>
+            </a:r>
+          </a:p>
+        </p:txBody>
+      </p:sp>
+      <p:sp>
+        <p:nvSpPr>
+          <p:cNvPr id="6" name="Rounded Rectangle 5"/>
+          <p:cNvSpPr/>
+          <p:nvPr/>
+        </p:nvSpPr>
+        <p:spPr>
+          <a:xfrm>
+            <a:off x="640080" y="1828800"/>
+            <a:ext cx="10911535" cy="4297680"/>
+          </a:xfrm>
+          <a:prstGeom prst="roundRect">
+            <a:avLst/>
+          </a:prstGeom>
+          <a:solidFill>
+            <a:srgbClr val="FFFFFF"/>
+          </a:solidFill>
+          <a:ln w="20320">
+            <a:solidFill>
+              <a:srgbClr val="C8A86B"/>
+            </a:solidFill>
+          </a:ln>
+          <a:effectLst/>
+        </p:spPr>
+        <p:style>
+          <a:lnRef idx="1">
+            <a:schemeClr val="accent1"/>
+          </a:lnRef>
+          <a:fillRef idx="3">
+            <a:schemeClr val="accent1"/>
+          </a:fillRef>
+          <a:effectRef idx="2">
+            <a:schemeClr val="accent1"/>
+          </a:effectRef>
+          <a:fontRef idx="minor">
+            <a:schemeClr val="lt1"/>
+          </a:fontRef>
+        </p:style>
+        <p:txBody>
+          <a:bodyPr rtlCol="0" anchor="ctr"/>
+          <a:lstStyle/>
+          <a:p>
+            <a:pPr algn="ctr"/>
+          </a:p>
+        </p:txBody>
+      </p:sp>
+      <p:sp>
+        <p:nvSpPr>
+          <p:cNvPr id="7" name="Rectangle 6"/>
+          <p:cNvSpPr/>
+          <p:nvPr/>
+        </p:nvSpPr>
+        <p:spPr>
+          <a:xfrm>
+            <a:off x="640080" y="1828800"/>
+            <a:ext cx="128016" cy="4297680"/>
           </a:xfrm>
           <a:prstGeom prst="rect">
             <a:avLst/>
@@ -7451,60 +7692,14 @@
       </p:sp>
       <p:sp>
         <p:nvSpPr>
-          <p:cNvPr id="5" name="Rounded Rectangle 4"/>
-          <p:cNvSpPr/>
-          <p:nvPr/>
-        </p:nvSpPr>
-        <p:spPr>
-          <a:xfrm>
-            <a:off x="640080" y="1417320"/>
-            <a:ext cx="10911535" cy="5394960"/>
-          </a:xfrm>
-          <a:prstGeom prst="roundRect">
-            <a:avLst/>
-          </a:prstGeom>
-          <a:solidFill>
-            <a:srgbClr val="FFFFFF"/>
-          </a:solidFill>
-          <a:ln w="25400">
-            <a:solidFill>
-              <a:srgbClr val="C8A86B"/>
-            </a:solidFill>
-          </a:ln>
-          <a:effectLst/>
-        </p:spPr>
-        <p:style>
-          <a:lnRef idx="1">
-            <a:schemeClr val="accent1"/>
-          </a:lnRef>
-          <a:fillRef idx="3">
-            <a:schemeClr val="accent1"/>
-          </a:fillRef>
-          <a:effectRef idx="2">
-            <a:schemeClr val="accent1"/>
-          </a:effectRef>
-          <a:fontRef idx="minor">
-            <a:schemeClr val="lt1"/>
-          </a:fontRef>
-        </p:style>
-        <p:txBody>
-          <a:bodyPr rtlCol="0" anchor="ctr"/>
-          <a:lstStyle/>
-          <a:p>
-            <a:pPr algn="ctr"/>
-          </a:p>
-        </p:txBody>
-      </p:sp>
-      <p:sp>
-        <p:nvSpPr>
-          <p:cNvPr id="6" name="TextBox 5"/>
+          <p:cNvPr id="8" name="TextBox 7"/>
           <p:cNvSpPr txBox="1"/>
           <p:nvPr/>
         </p:nvSpPr>
         <p:spPr>
           <a:xfrm>
-            <a:off x="914400" y="1554480"/>
-            <a:ext cx="10362895" cy="5120640"/>
+            <a:off x="1051560" y="2057400"/>
+            <a:ext cx="10180015" cy="3840480"/>
           </a:xfrm>
           <a:prstGeom prst="rect">
             <a:avLst/>
@@ -7519,43 +7714,218 @@
           <a:p>
             <a:pPr algn="l">
               <a:lnSpc>
-                <a:spcPct val="110000"/>
+                <a:spcPct val="130000"/>
               </a:lnSpc>
               <a:spcAft>
-                <a:spcPts val="100"/>
+                <a:spcPts val="500"/>
               </a:spcAft>
             </a:pPr>
             <a:r>
-              <a:rPr sz="1300" b="0">
+              <a:rPr sz="1400" b="0">
                 <a:solidFill>
                   <a:srgbClr val="1C2A33"/>
                 </a:solidFill>
-                <a:latin typeface="微软雅黑"/>
-                <a:ea typeface="微软雅黑"/>
-                <a:cs typeface="微软雅黑"/>
+                <a:latin typeface="楷体"/>
+                <a:ea typeface="楷体"/>
+                <a:cs typeface="楷体"/>
               </a:rPr>
-              <a:t>┌── 成语探究 ──┐
-│ 来源四: │
-│ 神话/史/寓/诗 │
-│ │
-│ 结构:四字为主 │
-│ 并列/主谓/动宾 │
-│ │
-│ 误用三型: │
-│ 望文(不刊) │
-│ 对象(汗牛→书) │
-│ 色彩(倾巢贬) │
-│ │
-│ 运用三步: │
-│ 源→构→辨 │
-└────────────────┘</a:t>
-            </a:r>
-          </a:p>
-        </p:txBody>
-      </p:sp>
-      <p:sp>
-        <p:nvSpPr>
-          <p:cNvPr id="7" name="TextBox 6"/>
+              <a:t>来源四:</a:t>
+            </a:r>
+          </a:p>
+          <a:p>
+            <a:pPr algn="l">
+              <a:lnSpc>
+                <a:spcPct val="130000"/>
+              </a:lnSpc>
+              <a:spcAft>
+                <a:spcPts val="500"/>
+              </a:spcAft>
+            </a:pPr>
+            <a:r>
+              <a:rPr sz="1400" b="0">
+                <a:solidFill>
+                  <a:srgbClr val="1C2A33"/>
+                </a:solidFill>
+                <a:latin typeface="楷体"/>
+                <a:ea typeface="楷体"/>
+                <a:cs typeface="楷体"/>
+              </a:rPr>
+              <a:t>神话/史/寓/诗</a:t>
+            </a:r>
+          </a:p>
+          <a:p>
+            <a:pPr algn="l">
+              <a:lnSpc>
+                <a:spcPct val="130000"/>
+              </a:lnSpc>
+              <a:spcAft>
+                <a:spcPts val="500"/>
+              </a:spcAft>
+            </a:pPr>
+            <a:r>
+              <a:rPr sz="1400" b="0">
+                <a:solidFill>
+                  <a:srgbClr val="1C2A33"/>
+                </a:solidFill>
+                <a:latin typeface="楷体"/>
+                <a:ea typeface="楷体"/>
+                <a:cs typeface="楷体"/>
+              </a:rPr>
+              <a:t>结构:四字为主</a:t>
+            </a:r>
+          </a:p>
+          <a:p>
+            <a:pPr algn="l">
+              <a:lnSpc>
+                <a:spcPct val="130000"/>
+              </a:lnSpc>
+              <a:spcAft>
+                <a:spcPts val="500"/>
+              </a:spcAft>
+            </a:pPr>
+            <a:r>
+              <a:rPr sz="1400" b="0">
+                <a:solidFill>
+                  <a:srgbClr val="1C2A33"/>
+                </a:solidFill>
+                <a:latin typeface="楷体"/>
+                <a:ea typeface="楷体"/>
+                <a:cs typeface="楷体"/>
+              </a:rPr>
+              <a:t>并列/主谓/动宾</a:t>
+            </a:r>
+          </a:p>
+          <a:p>
+            <a:pPr algn="l">
+              <a:lnSpc>
+                <a:spcPct val="130000"/>
+              </a:lnSpc>
+              <a:spcAft>
+                <a:spcPts val="500"/>
+              </a:spcAft>
+            </a:pPr>
+            <a:r>
+              <a:rPr sz="1400" b="0">
+                <a:solidFill>
+                  <a:srgbClr val="1C2A33"/>
+                </a:solidFill>
+                <a:latin typeface="楷体"/>
+                <a:ea typeface="楷体"/>
+                <a:cs typeface="楷体"/>
+              </a:rPr>
+              <a:t>误用三型:</a:t>
+            </a:r>
+          </a:p>
+          <a:p>
+            <a:pPr algn="l">
+              <a:lnSpc>
+                <a:spcPct val="130000"/>
+              </a:lnSpc>
+              <a:spcAft>
+                <a:spcPts val="500"/>
+              </a:spcAft>
+            </a:pPr>
+            <a:r>
+              <a:rPr sz="1400" b="0">
+                <a:solidFill>
+                  <a:srgbClr val="1C2A33"/>
+                </a:solidFill>
+                <a:latin typeface="楷体"/>
+                <a:ea typeface="楷体"/>
+                <a:cs typeface="楷体"/>
+              </a:rPr>
+              <a:t>望文(不刊)</a:t>
+            </a:r>
+          </a:p>
+          <a:p>
+            <a:pPr algn="l">
+              <a:lnSpc>
+                <a:spcPct val="130000"/>
+              </a:lnSpc>
+              <a:spcAft>
+                <a:spcPts val="500"/>
+              </a:spcAft>
+            </a:pPr>
+            <a:r>
+              <a:rPr sz="1400" b="0">
+                <a:solidFill>
+                  <a:srgbClr val="1C2A33"/>
+                </a:solidFill>
+                <a:latin typeface="楷体"/>
+                <a:ea typeface="楷体"/>
+                <a:cs typeface="楷体"/>
+              </a:rPr>
+              <a:t>对象(汗牛→书)</a:t>
+            </a:r>
+          </a:p>
+          <a:p>
+            <a:pPr algn="l">
+              <a:lnSpc>
+                <a:spcPct val="130000"/>
+              </a:lnSpc>
+              <a:spcAft>
+                <a:spcPts val="500"/>
+              </a:spcAft>
+            </a:pPr>
+            <a:r>
+              <a:rPr sz="1400" b="0">
+                <a:solidFill>
+                  <a:srgbClr val="1C2A33"/>
+                </a:solidFill>
+                <a:latin typeface="楷体"/>
+                <a:ea typeface="楷体"/>
+                <a:cs typeface="楷体"/>
+              </a:rPr>
+              <a:t>色彩(倾巢贬)</a:t>
+            </a:r>
+          </a:p>
+          <a:p>
+            <a:pPr algn="l">
+              <a:lnSpc>
+                <a:spcPct val="130000"/>
+              </a:lnSpc>
+              <a:spcAft>
+                <a:spcPts val="500"/>
+              </a:spcAft>
+            </a:pPr>
+            <a:r>
+              <a:rPr sz="1400" b="0">
+                <a:solidFill>
+                  <a:srgbClr val="1C2A33"/>
+                </a:solidFill>
+                <a:latin typeface="楷体"/>
+                <a:ea typeface="楷体"/>
+                <a:cs typeface="楷体"/>
+              </a:rPr>
+              <a:t>运用三步:</a:t>
+            </a:r>
+          </a:p>
+          <a:p>
+            <a:pPr algn="l">
+              <a:lnSpc>
+                <a:spcPct val="130000"/>
+              </a:lnSpc>
+              <a:spcAft>
+                <a:spcPts val="500"/>
+              </a:spcAft>
+            </a:pPr>
+            <a:r>
+              <a:rPr sz="1400" b="0">
+                <a:solidFill>
+                  <a:srgbClr val="1C2A33"/>
+                </a:solidFill>
+                <a:latin typeface="楷体"/>
+                <a:ea typeface="楷体"/>
+                <a:cs typeface="楷体"/>
+              </a:rPr>
+              <a:t>源→构→辨</a:t>
+            </a:r>
+          </a:p>
+        </p:txBody>
+      </p:sp>
+      <p:sp>
+        <p:nvSpPr>
+          <p:cNvPr id="9" name="TextBox 8"/>
           <p:cNvSpPr txBox="1"/>
           <p:nvPr/>
         </p:nvSpPr>
@@ -7682,13 +8052,13 @@
             <a:r>
               <a:rPr sz="1300" b="1">
                 <a:solidFill>
-                  <a:srgbClr val="2E7D6B"/>
+                  <a:srgbClr val="B23A2A"/>
                 </a:solidFill>
                 <a:latin typeface="微软雅黑"/>
                 <a:ea typeface="微软雅黑"/>
                 <a:cs typeface="微软雅黑"/>
               </a:rPr>
-              <a:t>分层作业</a:t>
+              <a:t>作业</a:t>
             </a:r>
           </a:p>
         </p:txBody>
@@ -7703,6 +8073,301 @@
           <a:xfrm>
             <a:off x="640080" y="1097280"/>
             <a:ext cx="822960" cy="30480"/>
+          </a:xfrm>
+          <a:prstGeom prst="rect">
+            <a:avLst/>
+          </a:prstGeom>
+          <a:solidFill>
+            <a:srgbClr val="B23A2A"/>
+          </a:solidFill>
+          <a:ln>
+            <a:noFill/>
+          </a:ln>
+          <a:effectLst/>
+        </p:spPr>
+        <p:style>
+          <a:lnRef idx="1">
+            <a:schemeClr val="accent1"/>
+          </a:lnRef>
+          <a:fillRef idx="3">
+            <a:schemeClr val="accent1"/>
+          </a:fillRef>
+          <a:effectRef idx="2">
+            <a:schemeClr val="accent1"/>
+          </a:effectRef>
+          <a:fontRef idx="minor">
+            <a:schemeClr val="lt1"/>
+          </a:fontRef>
+        </p:style>
+        <p:txBody>
+          <a:bodyPr rtlCol="0" anchor="ctr"/>
+          <a:lstStyle/>
+          <a:p>
+            <a:pPr algn="ctr"/>
+          </a:p>
+        </p:txBody>
+      </p:sp>
+      <p:sp>
+        <p:nvSpPr>
+          <p:cNvPr id="5" name="TextBox 4"/>
+          <p:cNvSpPr txBox="1"/>
+          <p:nvPr/>
+        </p:nvSpPr>
+        <p:spPr>
+          <a:xfrm>
+            <a:off x="640080" y="1325880"/>
+            <a:ext cx="10058400" cy="640080"/>
+          </a:xfrm>
+          <a:prstGeom prst="rect">
+            <a:avLst/>
+          </a:prstGeom>
+          <a:noFill/>
+        </p:spPr>
+        <p:txBody>
+          <a:bodyPr wrap="square" anchor="t" lIns="0" rIns="0" tIns="0" bIns="0">
+            <a:spAutoFit/>
+          </a:bodyPr>
+          <a:lstStyle/>
+          <a:p>
+            <a:pPr algn="l"/>
+            <a:r>
+              <a:rPr sz="3000" b="1">
+                <a:solidFill>
+                  <a:srgbClr val="1C2A33"/>
+                </a:solidFill>
+                <a:latin typeface="楷体"/>
+                <a:ea typeface="楷体"/>
+                <a:cs typeface="楷体"/>
+              </a:rPr>
+              <a:t>分层作业</a:t>
+            </a:r>
+          </a:p>
+        </p:txBody>
+      </p:sp>
+      <p:sp>
+        <p:nvSpPr>
+          <p:cNvPr id="6" name="Rounded Rectangle 5"/>
+          <p:cNvSpPr/>
+          <p:nvPr/>
+        </p:nvSpPr>
+        <p:spPr>
+          <a:xfrm>
+            <a:off x="640080" y="2194560"/>
+            <a:ext cx="5272887" cy="3931920"/>
+          </a:xfrm>
+          <a:prstGeom prst="roundRect">
+            <a:avLst/>
+          </a:prstGeom>
+          <a:solidFill>
+            <a:srgbClr val="FFFFFF"/>
+          </a:solidFill>
+          <a:ln w="20320">
+            <a:solidFill>
+              <a:srgbClr val="B23A2A"/>
+            </a:solidFill>
+          </a:ln>
+          <a:effectLst/>
+        </p:spPr>
+        <p:style>
+          <a:lnRef idx="1">
+            <a:schemeClr val="accent1"/>
+          </a:lnRef>
+          <a:fillRef idx="3">
+            <a:schemeClr val="accent1"/>
+          </a:fillRef>
+          <a:effectRef idx="2">
+            <a:schemeClr val="accent1"/>
+          </a:effectRef>
+          <a:fontRef idx="minor">
+            <a:schemeClr val="lt1"/>
+          </a:fontRef>
+        </p:style>
+        <p:txBody>
+          <a:bodyPr rtlCol="0" anchor="ctr"/>
+          <a:lstStyle/>
+          <a:p>
+            <a:pPr algn="ctr"/>
+          </a:p>
+        </p:txBody>
+      </p:sp>
+      <p:sp>
+        <p:nvSpPr>
+          <p:cNvPr id="7" name="Rectangle 6"/>
+          <p:cNvSpPr/>
+          <p:nvPr/>
+        </p:nvSpPr>
+        <p:spPr>
+          <a:xfrm>
+            <a:off x="640080" y="2194560"/>
+            <a:ext cx="5272887" cy="548640"/>
+          </a:xfrm>
+          <a:prstGeom prst="rect">
+            <a:avLst/>
+          </a:prstGeom>
+          <a:solidFill>
+            <a:srgbClr val="B23A2A"/>
+          </a:solidFill>
+          <a:ln>
+            <a:noFill/>
+          </a:ln>
+          <a:effectLst/>
+        </p:spPr>
+        <p:style>
+          <a:lnRef idx="1">
+            <a:schemeClr val="accent1"/>
+          </a:lnRef>
+          <a:fillRef idx="3">
+            <a:schemeClr val="accent1"/>
+          </a:fillRef>
+          <a:effectRef idx="2">
+            <a:schemeClr val="accent1"/>
+          </a:effectRef>
+          <a:fontRef idx="minor">
+            <a:schemeClr val="lt1"/>
+          </a:fontRef>
+        </p:style>
+        <p:txBody>
+          <a:bodyPr rtlCol="0" anchor="ctr"/>
+          <a:lstStyle/>
+          <a:p>
+            <a:pPr algn="ctr"/>
+          </a:p>
+        </p:txBody>
+      </p:sp>
+      <p:sp>
+        <p:nvSpPr>
+          <p:cNvPr id="8" name="TextBox 7"/>
+          <p:cNvSpPr txBox="1"/>
+          <p:nvPr/>
+        </p:nvSpPr>
+        <p:spPr>
+          <a:xfrm>
+            <a:off x="640080" y="2304288"/>
+            <a:ext cx="5272887" cy="365760"/>
+          </a:xfrm>
+          <a:prstGeom prst="rect">
+            <a:avLst/>
+          </a:prstGeom>
+          <a:noFill/>
+        </p:spPr>
+        <p:txBody>
+          <a:bodyPr wrap="square" anchor="t" lIns="0" rIns="0" tIns="0" bIns="0">
+            <a:spAutoFit/>
+          </a:bodyPr>
+          <a:lstStyle/>
+          <a:p>
+            <a:pPr algn="ctr"/>
+            <a:r>
+              <a:rPr sz="1600" b="1">
+                <a:solidFill>
+                  <a:srgbClr val="FFFFFF"/>
+                </a:solidFill>
+                <a:latin typeface="微软雅黑"/>
+                <a:ea typeface="微软雅黑"/>
+                <a:cs typeface="微软雅黑"/>
+              </a:rPr>
+              <a:t>基础 · 必做</a:t>
+            </a:r>
+          </a:p>
+        </p:txBody>
+      </p:sp>
+      <p:sp>
+        <p:nvSpPr>
+          <p:cNvPr id="9" name="TextBox 8"/>
+          <p:cNvSpPr txBox="1"/>
+          <p:nvPr/>
+        </p:nvSpPr>
+        <p:spPr>
+          <a:xfrm>
+            <a:off x="914400" y="2971800"/>
+            <a:ext cx="4724247" cy="3017520"/>
+          </a:xfrm>
+          <a:prstGeom prst="rect">
+            <a:avLst/>
+          </a:prstGeom>
+          <a:noFill/>
+        </p:spPr>
+        <p:txBody>
+          <a:bodyPr wrap="square" anchor="t" lIns="0" rIns="0" tIns="0" bIns="0">
+            <a:spAutoFit/>
+          </a:bodyPr>
+          <a:lstStyle/>
+          <a:p>
+            <a:pPr algn="ctr">
+              <a:lnSpc>
+                <a:spcPct val="150000"/>
+              </a:lnSpc>
+            </a:pPr>
+            <a:r>
+              <a:rPr sz="1350" b="0">
+                <a:solidFill>
+                  <a:srgbClr val="1C2A33"/>
+                </a:solidFill>
+                <a:latin typeface="楷体"/>
+                <a:ea typeface="楷体"/>
+                <a:cs typeface="楷体"/>
+              </a:rPr>
+              <a:t>1. 写出成语来源四类各一例。2. 解释「汗牛充栋」「美轮美奂」的适用对象。</a:t>
+            </a:r>
+          </a:p>
+        </p:txBody>
+      </p:sp>
+      <p:sp>
+        <p:nvSpPr>
+          <p:cNvPr id="10" name="Rounded Rectangle 9"/>
+          <p:cNvSpPr/>
+          <p:nvPr/>
+        </p:nvSpPr>
+        <p:spPr>
+          <a:xfrm>
+            <a:off x="6278727" y="2194560"/>
+            <a:ext cx="5272887" cy="3931920"/>
+          </a:xfrm>
+          <a:prstGeom prst="roundRect">
+            <a:avLst/>
+          </a:prstGeom>
+          <a:solidFill>
+            <a:srgbClr val="FFFFFF"/>
+          </a:solidFill>
+          <a:ln w="20320">
+            <a:solidFill>
+              <a:srgbClr val="2E7D6B"/>
+            </a:solidFill>
+          </a:ln>
+          <a:effectLst/>
+        </p:spPr>
+        <p:style>
+          <a:lnRef idx="1">
+            <a:schemeClr val="accent1"/>
+          </a:lnRef>
+          <a:fillRef idx="3">
+            <a:schemeClr val="accent1"/>
+          </a:fillRef>
+          <a:effectRef idx="2">
+            <a:schemeClr val="accent1"/>
+          </a:effectRef>
+          <a:fontRef idx="minor">
+            <a:schemeClr val="lt1"/>
+          </a:fontRef>
+        </p:style>
+        <p:txBody>
+          <a:bodyPr rtlCol="0" anchor="ctr"/>
+          <a:lstStyle/>
+          <a:p>
+            <a:pPr algn="ctr"/>
+          </a:p>
+        </p:txBody>
+      </p:sp>
+      <p:sp>
+        <p:nvSpPr>
+          <p:cNvPr id="11" name="Rectangle 10"/>
+          <p:cNvSpPr/>
+          <p:nvPr/>
+        </p:nvSpPr>
+        <p:spPr>
+          <a:xfrm>
+            <a:off x="6278727" y="2194560"/>
+            <a:ext cx="5272887" cy="548640"/>
           </a:xfrm>
           <a:prstGeom prst="rect">
             <a:avLst/>
@@ -7739,60 +8404,14 @@
       </p:sp>
       <p:sp>
         <p:nvSpPr>
-          <p:cNvPr id="5" name="Rounded Rectangle 4"/>
-          <p:cNvSpPr/>
-          <p:nvPr/>
-        </p:nvSpPr>
-        <p:spPr>
-          <a:xfrm>
-            <a:off x="640080" y="1417320"/>
-            <a:ext cx="10911535" cy="1417320"/>
-          </a:xfrm>
-          <a:prstGeom prst="roundRect">
-            <a:avLst/>
-          </a:prstGeom>
-          <a:solidFill>
-            <a:srgbClr val="FFFFFF"/>
-          </a:solidFill>
-          <a:ln w="22860">
-            <a:solidFill>
-              <a:srgbClr val="2E7D6B"/>
-            </a:solidFill>
-          </a:ln>
-          <a:effectLst/>
-        </p:spPr>
-        <p:style>
-          <a:lnRef idx="1">
-            <a:schemeClr val="accent1"/>
-          </a:lnRef>
-          <a:fillRef idx="3">
-            <a:schemeClr val="accent1"/>
-          </a:fillRef>
-          <a:effectRef idx="2">
-            <a:schemeClr val="accent1"/>
-          </a:effectRef>
-          <a:fontRef idx="minor">
-            <a:schemeClr val="lt1"/>
-          </a:fontRef>
-        </p:style>
-        <p:txBody>
-          <a:bodyPr rtlCol="0" anchor="ctr"/>
-          <a:lstStyle/>
-          <a:p>
-            <a:pPr algn="ctr"/>
-          </a:p>
-        </p:txBody>
-      </p:sp>
-      <p:sp>
-        <p:nvSpPr>
-          <p:cNvPr id="6" name="TextBox 5"/>
+          <p:cNvPr id="12" name="TextBox 11"/>
           <p:cNvSpPr txBox="1"/>
           <p:nvPr/>
         </p:nvSpPr>
         <p:spPr>
           <a:xfrm>
-            <a:off x="1371600" y="1527048"/>
-            <a:ext cx="9997135" cy="457200"/>
+            <a:off x="6278727" y="2304288"/>
+            <a:ext cx="5272887" cy="365760"/>
           </a:xfrm>
           <a:prstGeom prst="rect">
             <a:avLst/>
@@ -7805,35 +8424,31 @@
           </a:bodyPr>
           <a:lstStyle/>
           <a:p>
-            <a:pPr algn="l">
-              <a:lnSpc>
-                <a:spcPct val="110000"/>
-              </a:lnSpc>
-            </a:pPr>
+            <a:pPr algn="ctr"/>
             <a:r>
               <a:rPr sz="1600" b="1">
                 <a:solidFill>
-                  <a:srgbClr val="1C2A33"/>
+                  <a:srgbClr val="FFFFFF"/>
                 </a:solidFill>
                 <a:latin typeface="微软雅黑"/>
                 <a:ea typeface="微软雅黑"/>
                 <a:cs typeface="微软雅黑"/>
               </a:rPr>
-              <a:t/>
-            </a:r>
-          </a:p>
-        </p:txBody>
-      </p:sp>
-      <p:sp>
-        <p:nvSpPr>
-          <p:cNvPr id="7" name="TextBox 6"/>
+              <a:t>提升 · 选做</a:t>
+            </a:r>
+          </a:p>
+        </p:txBody>
+      </p:sp>
+      <p:sp>
+        <p:nvSpPr>
+          <p:cNvPr id="13" name="TextBox 12"/>
           <p:cNvSpPr txBox="1"/>
           <p:nvPr/>
         </p:nvSpPr>
         <p:spPr>
           <a:xfrm>
-            <a:off x="1371600" y="1965960"/>
-            <a:ext cx="9997135" cy="777240"/>
+            <a:off x="6553047" y="2971800"/>
+            <a:ext cx="4724247" cy="3017520"/>
           </a:xfrm>
           <a:prstGeom prst="rect">
             <a:avLst/>
@@ -7846,13 +8461,13 @@
           </a:bodyPr>
           <a:lstStyle/>
           <a:p>
-            <a:pPr algn="l">
+            <a:pPr algn="ctr">
               <a:lnSpc>
-                <a:spcPct val="128000"/>
+                <a:spcPct val="150000"/>
               </a:lnSpc>
             </a:pPr>
             <a:r>
-              <a:rPr sz="1200" b="0">
+              <a:rPr sz="1350" b="0">
                 <a:solidFill>
                   <a:srgbClr val="1C2A33"/>
                 </a:solidFill>
@@ -7860,142 +8475,14 @@
                 <a:ea typeface="楷体"/>
                 <a:cs typeface="楷体"/>
               </a:rPr>
-              <a:t>【基础作业】1. 写出成语来源四类各一例。2. 解释「汗牛充栋」「美轮美奂」的适用对象。</a:t>
-            </a:r>
-          </a:p>
-        </p:txBody>
-      </p:sp>
-      <p:sp>
-        <p:nvSpPr>
-          <p:cNvPr id="8" name="Rounded Rectangle 7"/>
-          <p:cNvSpPr/>
-          <p:nvPr/>
-        </p:nvSpPr>
-        <p:spPr>
-          <a:xfrm>
-            <a:off x="640080" y="2971800"/>
-            <a:ext cx="10911535" cy="1417320"/>
-          </a:xfrm>
-          <a:prstGeom prst="roundRect">
-            <a:avLst/>
-          </a:prstGeom>
-          <a:solidFill>
-            <a:srgbClr val="FFFFFF"/>
-          </a:solidFill>
-          <a:ln w="22860">
-            <a:solidFill>
-              <a:srgbClr val="2E7D6B"/>
-            </a:solidFill>
-          </a:ln>
-          <a:effectLst/>
-        </p:spPr>
-        <p:style>
-          <a:lnRef idx="1">
-            <a:schemeClr val="accent1"/>
-          </a:lnRef>
-          <a:fillRef idx="3">
-            <a:schemeClr val="accent1"/>
-          </a:fillRef>
-          <a:effectRef idx="2">
-            <a:schemeClr val="accent1"/>
-          </a:effectRef>
-          <a:fontRef idx="minor">
-            <a:schemeClr val="lt1"/>
-          </a:fontRef>
-        </p:style>
-        <p:txBody>
-          <a:bodyPr rtlCol="0" anchor="ctr"/>
-          <a:lstStyle/>
-          <a:p>
-            <a:pPr algn="ctr"/>
-          </a:p>
-        </p:txBody>
-      </p:sp>
-      <p:sp>
-        <p:nvSpPr>
-          <p:cNvPr id="9" name="TextBox 8"/>
-          <p:cNvSpPr txBox="1"/>
-          <p:nvPr/>
-        </p:nvSpPr>
-        <p:spPr>
-          <a:xfrm>
-            <a:off x="1371600" y="3081528"/>
-            <a:ext cx="9997135" cy="457200"/>
-          </a:xfrm>
-          <a:prstGeom prst="rect">
-            <a:avLst/>
-          </a:prstGeom>
-          <a:noFill/>
-        </p:spPr>
-        <p:txBody>
-          <a:bodyPr wrap="square" anchor="t" lIns="0" rIns="0" tIns="0" bIns="0">
-            <a:spAutoFit/>
-          </a:bodyPr>
-          <a:lstStyle/>
-          <a:p>
-            <a:pPr algn="l">
-              <a:lnSpc>
-                <a:spcPct val="110000"/>
-              </a:lnSpc>
-            </a:pPr>
-            <a:r>
-              <a:rPr sz="1600" b="1">
-                <a:solidFill>
-                  <a:srgbClr val="1C2A33"/>
-                </a:solidFill>
-                <a:latin typeface="微软雅黑"/>
-                <a:ea typeface="微软雅黑"/>
-                <a:cs typeface="微软雅黑"/>
-              </a:rPr>
-              <a:t/>
-            </a:r>
-          </a:p>
-        </p:txBody>
-      </p:sp>
-      <p:sp>
-        <p:nvSpPr>
-          <p:cNvPr id="10" name="TextBox 9"/>
-          <p:cNvSpPr txBox="1"/>
-          <p:nvPr/>
-        </p:nvSpPr>
-        <p:spPr>
-          <a:xfrm>
-            <a:off x="1371600" y="3520440"/>
-            <a:ext cx="9997135" cy="777240"/>
-          </a:xfrm>
-          <a:prstGeom prst="rect">
-            <a:avLst/>
-          </a:prstGeom>
-          <a:noFill/>
-        </p:spPr>
-        <p:txBody>
-          <a:bodyPr wrap="square" anchor="t" lIns="0" rIns="0" tIns="0" bIns="0">
-            <a:spAutoFit/>
-          </a:bodyPr>
-          <a:lstStyle/>
-          <a:p>
-            <a:pPr algn="l">
-              <a:lnSpc>
-                <a:spcPct val="128000"/>
-              </a:lnSpc>
-            </a:pPr>
-            <a:r>
-              <a:rPr sz="1200" b="0">
-                <a:solidFill>
-                  <a:srgbClr val="1C2A33"/>
-                </a:solidFill>
-                <a:latin typeface="楷体"/>
-                <a:ea typeface="楷体"/>
-                <a:cs typeface="楷体"/>
-              </a:rPr>
-              <a:t>【提高作业】写150字「我用错过的成语」，要求：①举一词；②说误用类型；③给正用句。</a:t>
-            </a:r>
-          </a:p>
-        </p:txBody>
-      </p:sp>
-      <p:sp>
-        <p:nvSpPr>
-          <p:cNvPr id="11" name="TextBox 10"/>
+              <a:t>写150字「我用错过的成语」，要求：①举一词；②说误用类型；③给正用句。</a:t>
+            </a:r>
+          </a:p>
+        </p:txBody>
+      </p:sp>
+      <p:sp>
+        <p:nvSpPr>
+          <p:cNvPr id="14" name="TextBox 13"/>
           <p:cNvSpPr txBox="1"/>
           <p:nvPr/>
         </p:nvSpPr>
@@ -8122,13 +8609,13 @@
             <a:r>
               <a:rPr sz="1300" b="1">
                 <a:solidFill>
-                  <a:srgbClr val="C8A86B"/>
+                  <a:srgbClr val="B23A2A"/>
                 </a:solidFill>
                 <a:latin typeface="微软雅黑"/>
                 <a:ea typeface="微软雅黑"/>
                 <a:cs typeface="微软雅黑"/>
               </a:rPr>
-              <a:t>本课小结</a:t>
+              <a:t>单元小结</a:t>
             </a:r>
           </a:p>
         </p:txBody>
@@ -8145,6 +8632,551 @@
             <a:ext cx="822960" cy="30480"/>
           </a:xfrm>
           <a:prstGeom prst="rect">
+            <a:avLst/>
+          </a:prstGeom>
+          <a:solidFill>
+            <a:srgbClr val="B23A2A"/>
+          </a:solidFill>
+          <a:ln>
+            <a:noFill/>
+          </a:ln>
+          <a:effectLst/>
+        </p:spPr>
+        <p:style>
+          <a:lnRef idx="1">
+            <a:schemeClr val="accent1"/>
+          </a:lnRef>
+          <a:fillRef idx="3">
+            <a:schemeClr val="accent1"/>
+          </a:fillRef>
+          <a:effectRef idx="2">
+            <a:schemeClr val="accent1"/>
+          </a:effectRef>
+          <a:fontRef idx="minor">
+            <a:schemeClr val="lt1"/>
+          </a:fontRef>
+        </p:style>
+        <p:txBody>
+          <a:bodyPr rtlCol="0" anchor="ctr"/>
+          <a:lstStyle/>
+          <a:p>
+            <a:pPr algn="ctr"/>
+          </a:p>
+        </p:txBody>
+      </p:sp>
+      <p:sp>
+        <p:nvSpPr>
+          <p:cNvPr id="5" name="TextBox 4"/>
+          <p:cNvSpPr txBox="1"/>
+          <p:nvPr/>
+        </p:nvSpPr>
+        <p:spPr>
+          <a:xfrm>
+            <a:off x="640080" y="1325880"/>
+            <a:ext cx="10058400" cy="640080"/>
+          </a:xfrm>
+          <a:prstGeom prst="rect">
+            <a:avLst/>
+          </a:prstGeom>
+          <a:noFill/>
+        </p:spPr>
+        <p:txBody>
+          <a:bodyPr wrap="square" anchor="t" lIns="0" rIns="0" tIns="0" bIns="0">
+            <a:spAutoFit/>
+          </a:bodyPr>
+          <a:lstStyle/>
+          <a:p>
+            <a:pPr algn="l"/>
+            <a:r>
+              <a:rPr sz="3000" b="1">
+                <a:solidFill>
+                  <a:srgbClr val="1C2A33"/>
+                </a:solidFill>
+                <a:latin typeface="楷体"/>
+                <a:ea typeface="楷体"/>
+                <a:cs typeface="楷体"/>
+              </a:rPr>
+              <a:t>单元回望</a:t>
+            </a:r>
+          </a:p>
+        </p:txBody>
+      </p:sp>
+      <p:sp>
+        <p:nvSpPr>
+          <p:cNvPr id="6" name="Rounded Rectangle 5"/>
+          <p:cNvSpPr/>
+          <p:nvPr/>
+        </p:nvSpPr>
+        <p:spPr>
+          <a:xfrm>
+            <a:off x="640080" y="1828800"/>
+            <a:ext cx="10911535" cy="1371600"/>
+          </a:xfrm>
+          <a:prstGeom prst="roundRect">
+            <a:avLst/>
+          </a:prstGeom>
+          <a:solidFill>
+            <a:srgbClr val="1C2A33"/>
+          </a:solidFill>
+          <a:effectLst/>
+        </p:spPr>
+        <p:style>
+          <a:lnRef idx="1">
+            <a:schemeClr val="accent1"/>
+          </a:lnRef>
+          <a:fillRef idx="3">
+            <a:schemeClr val="accent1"/>
+          </a:fillRef>
+          <a:effectRef idx="2">
+            <a:schemeClr val="accent1"/>
+          </a:effectRef>
+          <a:fontRef idx="minor">
+            <a:schemeClr val="lt1"/>
+          </a:fontRef>
+        </p:style>
+        <p:txBody>
+          <a:bodyPr rtlCol="0" anchor="ctr"/>
+          <a:lstStyle/>
+          <a:p>
+            <a:pPr algn="ctr"/>
+          </a:p>
+        </p:txBody>
+      </p:sp>
+      <p:sp>
+        <p:nvSpPr>
+          <p:cNvPr id="7" name="TextBox 6"/>
+          <p:cNvSpPr txBox="1"/>
+          <p:nvPr/>
+        </p:nvSpPr>
+        <p:spPr>
+          <a:xfrm>
+            <a:off x="1005840" y="1965960"/>
+            <a:ext cx="10180015" cy="1097280"/>
+          </a:xfrm>
+          <a:prstGeom prst="rect">
+            <a:avLst/>
+          </a:prstGeom>
+          <a:noFill/>
+        </p:spPr>
+        <p:txBody>
+          <a:bodyPr wrap="square" anchor="t" lIns="0" rIns="0" tIns="0" bIns="0">
+            <a:spAutoFit/>
+          </a:bodyPr>
+          <a:lstStyle/>
+          <a:p>
+            <a:pPr algn="ctr">
+              <a:lnSpc>
+                <a:spcPct val="145000"/>
+              </a:lnSpc>
+            </a:pPr>
+            <a:r>
+              <a:rPr sz="1500" b="0">
+                <a:solidFill>
+                  <a:srgbClr val="FFFFFF"/>
+                </a:solidFill>
+                <a:latin typeface="楷体"/>
+                <a:ea typeface="楷体"/>
+                <a:cs typeface="楷体"/>
+              </a:rPr>
+              <a:t>本单元「词语积累与词语解释」：成语大多有出处，读懂来源、看清结构，才能在语境里用得准、用得活。</a:t>
+            </a:r>
+          </a:p>
+        </p:txBody>
+      </p:sp>
+      <p:sp>
+        <p:nvSpPr>
+          <p:cNvPr id="8" name="Rounded Rectangle 7"/>
+          <p:cNvSpPr/>
+          <p:nvPr/>
+        </p:nvSpPr>
+        <p:spPr>
+          <a:xfrm>
+            <a:off x="640080" y="3474720"/>
+            <a:ext cx="10911535" cy="841248"/>
+          </a:xfrm>
+          <a:prstGeom prst="roundRect">
+            <a:avLst/>
+          </a:prstGeom>
+          <a:solidFill>
+            <a:srgbClr val="FFFFFF"/>
+          </a:solidFill>
+          <a:ln w="17780">
+            <a:solidFill>
+              <a:srgbClr val="B23A2A"/>
+            </a:solidFill>
+          </a:ln>
+          <a:effectLst/>
+        </p:spPr>
+        <p:style>
+          <a:lnRef idx="1">
+            <a:schemeClr val="accent1"/>
+          </a:lnRef>
+          <a:fillRef idx="3">
+            <a:schemeClr val="accent1"/>
+          </a:fillRef>
+          <a:effectRef idx="2">
+            <a:schemeClr val="accent1"/>
+          </a:effectRef>
+          <a:fontRef idx="minor">
+            <a:schemeClr val="lt1"/>
+          </a:fontRef>
+        </p:style>
+        <p:txBody>
+          <a:bodyPr rtlCol="0" anchor="ctr"/>
+          <a:lstStyle/>
+          <a:p>
+            <a:pPr algn="ctr"/>
+          </a:p>
+        </p:txBody>
+      </p:sp>
+      <p:sp>
+        <p:nvSpPr>
+          <p:cNvPr id="9" name="Oval 8"/>
+          <p:cNvSpPr/>
+          <p:nvPr/>
+        </p:nvSpPr>
+        <p:spPr>
+          <a:xfrm>
+            <a:off x="841248" y="3666744"/>
+            <a:ext cx="457200" cy="457200"/>
+          </a:xfrm>
+          <a:prstGeom prst="ellipse">
+            <a:avLst/>
+          </a:prstGeom>
+          <a:solidFill>
+            <a:srgbClr val="B23A2A"/>
+          </a:solidFill>
+          <a:ln>
+            <a:noFill/>
+          </a:ln>
+          <a:effectLst/>
+        </p:spPr>
+        <p:style>
+          <a:lnRef idx="1">
+            <a:schemeClr val="accent1"/>
+          </a:lnRef>
+          <a:fillRef idx="3">
+            <a:schemeClr val="accent1"/>
+          </a:fillRef>
+          <a:effectRef idx="2">
+            <a:schemeClr val="accent1"/>
+          </a:effectRef>
+          <a:fontRef idx="minor">
+            <a:schemeClr val="lt1"/>
+          </a:fontRef>
+        </p:style>
+        <p:txBody>
+          <a:bodyPr rtlCol="0" anchor="ctr"/>
+          <a:lstStyle/>
+          <a:p>
+            <a:pPr algn="ctr"/>
+          </a:p>
+        </p:txBody>
+      </p:sp>
+      <p:sp>
+        <p:nvSpPr>
+          <p:cNvPr id="10" name="TextBox 9"/>
+          <p:cNvSpPr txBox="1"/>
+          <p:nvPr/>
+        </p:nvSpPr>
+        <p:spPr>
+          <a:xfrm>
+            <a:off x="841248" y="3721608"/>
+            <a:ext cx="457200" cy="365760"/>
+          </a:xfrm>
+          <a:prstGeom prst="rect">
+            <a:avLst/>
+          </a:prstGeom>
+          <a:noFill/>
+        </p:spPr>
+        <p:txBody>
+          <a:bodyPr wrap="square" anchor="t" lIns="0" rIns="0" tIns="0" bIns="0">
+            <a:spAutoFit/>
+          </a:bodyPr>
+          <a:lstStyle/>
+          <a:p>
+            <a:pPr algn="ctr"/>
+            <a:r>
+              <a:rPr sz="1600" b="1">
+                <a:solidFill>
+                  <a:srgbClr val="FFFFFF"/>
+                </a:solidFill>
+                <a:latin typeface="微软雅黑"/>
+                <a:ea typeface="微软雅黑"/>
+                <a:cs typeface="微软雅黑"/>
+              </a:rPr>
+              <a:t>1</a:t>
+            </a:r>
+          </a:p>
+        </p:txBody>
+      </p:sp>
+      <p:sp>
+        <p:nvSpPr>
+          <p:cNvPr id="11" name="TextBox 10"/>
+          <p:cNvSpPr txBox="1"/>
+          <p:nvPr/>
+        </p:nvSpPr>
+        <p:spPr>
+          <a:xfrm>
+            <a:off x="1508760" y="3474720"/>
+            <a:ext cx="9905695" cy="841248"/>
+          </a:xfrm>
+          <a:prstGeom prst="rect">
+            <a:avLst/>
+          </a:prstGeom>
+          <a:noFill/>
+        </p:spPr>
+        <p:txBody>
+          <a:bodyPr wrap="square" anchor="ctr" lIns="0" rIns="0" tIns="0" bIns="0">
+            <a:spAutoFit/>
+          </a:bodyPr>
+          <a:lstStyle/>
+          <a:p>
+            <a:pPr algn="l">
+              <a:lnSpc>
+                <a:spcPct val="140000"/>
+              </a:lnSpc>
+            </a:pPr>
+            <a:r>
+              <a:rPr sz="1400" b="0">
+                <a:solidFill>
+                  <a:srgbClr val="1C2A33"/>
+                </a:solidFill>
+                <a:latin typeface="楷体"/>
+                <a:ea typeface="楷体"/>
+                <a:cs typeface="楷体"/>
+              </a:rPr>
+              <a:t>你平时用成语，是先想来源还是先套意思？</a:t>
+            </a:r>
+          </a:p>
+        </p:txBody>
+      </p:sp>
+      <p:sp>
+        <p:nvSpPr>
+          <p:cNvPr id="12" name="Rounded Rectangle 11"/>
+          <p:cNvSpPr/>
+          <p:nvPr/>
+        </p:nvSpPr>
+        <p:spPr>
+          <a:xfrm>
+            <a:off x="640080" y="4434840"/>
+            <a:ext cx="10911535" cy="841248"/>
+          </a:xfrm>
+          <a:prstGeom prst="roundRect">
+            <a:avLst/>
+          </a:prstGeom>
+          <a:solidFill>
+            <a:srgbClr val="FFFFFF"/>
+          </a:solidFill>
+          <a:ln w="17780">
+            <a:solidFill>
+              <a:srgbClr val="2E7D6B"/>
+            </a:solidFill>
+          </a:ln>
+          <a:effectLst/>
+        </p:spPr>
+        <p:style>
+          <a:lnRef idx="1">
+            <a:schemeClr val="accent1"/>
+          </a:lnRef>
+          <a:fillRef idx="3">
+            <a:schemeClr val="accent1"/>
+          </a:fillRef>
+          <a:effectRef idx="2">
+            <a:schemeClr val="accent1"/>
+          </a:effectRef>
+          <a:fontRef idx="minor">
+            <a:schemeClr val="lt1"/>
+          </a:fontRef>
+        </p:style>
+        <p:txBody>
+          <a:bodyPr rtlCol="0" anchor="ctr"/>
+          <a:lstStyle/>
+          <a:p>
+            <a:pPr algn="ctr"/>
+          </a:p>
+        </p:txBody>
+      </p:sp>
+      <p:sp>
+        <p:nvSpPr>
+          <p:cNvPr id="13" name="Oval 12"/>
+          <p:cNvSpPr/>
+          <p:nvPr/>
+        </p:nvSpPr>
+        <p:spPr>
+          <a:xfrm>
+            <a:off x="841248" y="4626864"/>
+            <a:ext cx="457200" cy="457200"/>
+          </a:xfrm>
+          <a:prstGeom prst="ellipse">
+            <a:avLst/>
+          </a:prstGeom>
+          <a:solidFill>
+            <a:srgbClr val="2E7D6B"/>
+          </a:solidFill>
+          <a:ln>
+            <a:noFill/>
+          </a:ln>
+          <a:effectLst/>
+        </p:spPr>
+        <p:style>
+          <a:lnRef idx="1">
+            <a:schemeClr val="accent1"/>
+          </a:lnRef>
+          <a:fillRef idx="3">
+            <a:schemeClr val="accent1"/>
+          </a:fillRef>
+          <a:effectRef idx="2">
+            <a:schemeClr val="accent1"/>
+          </a:effectRef>
+          <a:fontRef idx="minor">
+            <a:schemeClr val="lt1"/>
+          </a:fontRef>
+        </p:style>
+        <p:txBody>
+          <a:bodyPr rtlCol="0" anchor="ctr"/>
+          <a:lstStyle/>
+          <a:p>
+            <a:pPr algn="ctr"/>
+          </a:p>
+        </p:txBody>
+      </p:sp>
+      <p:sp>
+        <p:nvSpPr>
+          <p:cNvPr id="14" name="TextBox 13"/>
+          <p:cNvSpPr txBox="1"/>
+          <p:nvPr/>
+        </p:nvSpPr>
+        <p:spPr>
+          <a:xfrm>
+            <a:off x="841248" y="4681728"/>
+            <a:ext cx="457200" cy="365760"/>
+          </a:xfrm>
+          <a:prstGeom prst="rect">
+            <a:avLst/>
+          </a:prstGeom>
+          <a:noFill/>
+        </p:spPr>
+        <p:txBody>
+          <a:bodyPr wrap="square" anchor="t" lIns="0" rIns="0" tIns="0" bIns="0">
+            <a:spAutoFit/>
+          </a:bodyPr>
+          <a:lstStyle/>
+          <a:p>
+            <a:pPr algn="ctr"/>
+            <a:r>
+              <a:rPr sz="1600" b="1">
+                <a:solidFill>
+                  <a:srgbClr val="FFFFFF"/>
+                </a:solidFill>
+                <a:latin typeface="微软雅黑"/>
+                <a:ea typeface="微软雅黑"/>
+                <a:cs typeface="微软雅黑"/>
+              </a:rPr>
+              <a:t>2</a:t>
+            </a:r>
+          </a:p>
+        </p:txBody>
+      </p:sp>
+      <p:sp>
+        <p:nvSpPr>
+          <p:cNvPr id="15" name="TextBox 14"/>
+          <p:cNvSpPr txBox="1"/>
+          <p:nvPr/>
+        </p:nvSpPr>
+        <p:spPr>
+          <a:xfrm>
+            <a:off x="1508760" y="4434840"/>
+            <a:ext cx="9905695" cy="841248"/>
+          </a:xfrm>
+          <a:prstGeom prst="rect">
+            <a:avLst/>
+          </a:prstGeom>
+          <a:noFill/>
+        </p:spPr>
+        <p:txBody>
+          <a:bodyPr wrap="square" anchor="ctr" lIns="0" rIns="0" tIns="0" bIns="0">
+            <a:spAutoFit/>
+          </a:bodyPr>
+          <a:lstStyle/>
+          <a:p>
+            <a:pPr algn="l">
+              <a:lnSpc>
+                <a:spcPct val="140000"/>
+              </a:lnSpc>
+            </a:pPr>
+            <a:r>
+              <a:rPr sz="1400" b="0">
+                <a:solidFill>
+                  <a:srgbClr val="1C2A33"/>
+                </a:solidFill>
+                <a:latin typeface="楷体"/>
+                <a:ea typeface="楷体"/>
+                <a:cs typeface="楷体"/>
+              </a:rPr>
+              <a:t>找一个你常误用的成语，说说它真正的来源和意思。</a:t>
+            </a:r>
+          </a:p>
+        </p:txBody>
+      </p:sp>
+      <p:sp>
+        <p:nvSpPr>
+          <p:cNvPr id="16" name="Rounded Rectangle 15"/>
+          <p:cNvSpPr/>
+          <p:nvPr/>
+        </p:nvSpPr>
+        <p:spPr>
+          <a:xfrm>
+            <a:off x="640080" y="5394960"/>
+            <a:ext cx="10911535" cy="841248"/>
+          </a:xfrm>
+          <a:prstGeom prst="roundRect">
+            <a:avLst/>
+          </a:prstGeom>
+          <a:solidFill>
+            <a:srgbClr val="FFFFFF"/>
+          </a:solidFill>
+          <a:ln w="17780">
+            <a:solidFill>
+              <a:srgbClr val="C8A86B"/>
+            </a:solidFill>
+          </a:ln>
+          <a:effectLst/>
+        </p:spPr>
+        <p:style>
+          <a:lnRef idx="1">
+            <a:schemeClr val="accent1"/>
+          </a:lnRef>
+          <a:fillRef idx="3">
+            <a:schemeClr val="accent1"/>
+          </a:fillRef>
+          <a:effectRef idx="2">
+            <a:schemeClr val="accent1"/>
+          </a:effectRef>
+          <a:fontRef idx="minor">
+            <a:schemeClr val="lt1"/>
+          </a:fontRef>
+        </p:style>
+        <p:txBody>
+          <a:bodyPr rtlCol="0" anchor="ctr"/>
+          <a:lstStyle/>
+          <a:p>
+            <a:pPr algn="ctr"/>
+          </a:p>
+        </p:txBody>
+      </p:sp>
+      <p:sp>
+        <p:nvSpPr>
+          <p:cNvPr id="17" name="Oval 16"/>
+          <p:cNvSpPr/>
+          <p:nvPr/>
+        </p:nvSpPr>
+        <p:spPr>
+          <a:xfrm>
+            <a:off x="841248" y="5586984"/>
+            <a:ext cx="457200" cy="457200"/>
+          </a:xfrm>
+          <a:prstGeom prst="ellipse">
             <a:avLst/>
           </a:prstGeom>
           <a:solidFill>
@@ -8179,58 +9211,14 @@
       </p:sp>
       <p:sp>
         <p:nvSpPr>
-          <p:cNvPr id="5" name="Rectangle 4"/>
-          <p:cNvSpPr/>
-          <p:nvPr/>
-        </p:nvSpPr>
-        <p:spPr>
-          <a:xfrm>
-            <a:off x="640080" y="1737360"/>
-            <a:ext cx="54864" cy="431800"/>
-          </a:xfrm>
-          <a:prstGeom prst="rect">
-            <a:avLst/>
-          </a:prstGeom>
-          <a:solidFill>
-            <a:srgbClr val="C8A86B"/>
-          </a:solidFill>
-          <a:ln>
-            <a:noFill/>
-          </a:ln>
-          <a:effectLst/>
-        </p:spPr>
-        <p:style>
-          <a:lnRef idx="1">
-            <a:schemeClr val="accent1"/>
-          </a:lnRef>
-          <a:fillRef idx="3">
-            <a:schemeClr val="accent1"/>
-          </a:fillRef>
-          <a:effectRef idx="2">
-            <a:schemeClr val="accent1"/>
-          </a:effectRef>
-          <a:fontRef idx="minor">
-            <a:schemeClr val="lt1"/>
-          </a:fontRef>
-        </p:style>
-        <p:txBody>
-          <a:bodyPr rtlCol="0" anchor="ctr"/>
-          <a:lstStyle/>
-          <a:p>
-            <a:pPr algn="ctr"/>
-          </a:p>
-        </p:txBody>
-      </p:sp>
-      <p:sp>
-        <p:nvSpPr>
-          <p:cNvPr id="6" name="TextBox 5"/>
+          <p:cNvPr id="18" name="TextBox 17"/>
           <p:cNvSpPr txBox="1"/>
           <p:nvPr/>
         </p:nvSpPr>
         <p:spPr>
           <a:xfrm>
-            <a:off x="868680" y="1645920"/>
-            <a:ext cx="10682935" cy="2194560"/>
+            <a:off x="841248" y="5641848"/>
+            <a:ext cx="457200" cy="365760"/>
           </a:xfrm>
           <a:prstGeom prst="rect">
             <a:avLst/>
@@ -8243,16 +9231,50 @@
           </a:bodyPr>
           <a:lstStyle/>
           <a:p>
+            <a:pPr algn="ctr"/>
+            <a:r>
+              <a:rPr sz="1600" b="1">
+                <a:solidFill>
+                  <a:srgbClr val="FFFFFF"/>
+                </a:solidFill>
+                <a:latin typeface="微软雅黑"/>
+                <a:ea typeface="微软雅黑"/>
+                <a:cs typeface="微软雅黑"/>
+              </a:rPr>
+              <a:t>3</a:t>
+            </a:r>
+          </a:p>
+        </p:txBody>
+      </p:sp>
+      <p:sp>
+        <p:nvSpPr>
+          <p:cNvPr id="19" name="TextBox 18"/>
+          <p:cNvSpPr txBox="1"/>
+          <p:nvPr/>
+        </p:nvSpPr>
+        <p:spPr>
+          <a:xfrm>
+            <a:off x="1508760" y="5394960"/>
+            <a:ext cx="9905695" cy="841248"/>
+          </a:xfrm>
+          <a:prstGeom prst="rect">
+            <a:avLst/>
+          </a:prstGeom>
+          <a:noFill/>
+        </p:spPr>
+        <p:txBody>
+          <a:bodyPr wrap="square" anchor="ctr" lIns="0" rIns="0" tIns="0" bIns="0">
+            <a:spAutoFit/>
+          </a:bodyPr>
+          <a:lstStyle/>
+          <a:p>
             <a:pPr algn="l">
               <a:lnSpc>
-                <a:spcPct val="150000"/>
+                <a:spcPct val="140000"/>
               </a:lnSpc>
-              <a:spcAft>
-                <a:spcPts val="1000"/>
-              </a:spcAft>
             </a:pPr>
             <a:r>
-              <a:rPr sz="2200" b="0">
+              <a:rPr sz="1400" b="0">
                 <a:solidFill>
                   <a:srgbClr val="1C2A33"/>
                 </a:solidFill>
@@ -8260,28 +9282,14 @@
                 <a:ea typeface="楷体"/>
                 <a:cs typeface="楷体"/>
               </a:rPr>
-              <a:t>本单元主题：词语积累与词语解释。把今天学到的方法带进下一篇——自己读、自己想、自己写。</a:t>
-            </a:r>
-          </a:p>
-          <a:p>
-            <a:pPr algn="l"/>
-            <a:r>
-              <a:rPr sz="1600" b="1">
-                <a:solidFill>
-                  <a:srgbClr val="B23A2A"/>
-                </a:solidFill>
-                <a:latin typeface="微软雅黑"/>
-                <a:ea typeface="微软雅黑"/>
-                <a:cs typeface="微软雅黑"/>
-              </a:rPr>
-              <a:t>方法迁移：圈关键信息 → 理事件脉络 → 析人物精神</a:t>
-            </a:r>
-          </a:p>
-        </p:txBody>
-      </p:sp>
-      <p:sp>
-        <p:nvSpPr>
-          <p:cNvPr id="7" name="TextBox 6"/>
+              <a:t>试着用一个成语，写一句贴合语境的话。</a:t>
+            </a:r>
+          </a:p>
+        </p:txBody>
+      </p:sp>
+      <p:sp>
+        <p:nvSpPr>
+          <p:cNvPr id="20" name="TextBox 19"/>
           <p:cNvSpPr txBox="1"/>
           <p:nvPr/>
         </p:nvSpPr>
